--- a/필기.pptx
+++ b/필기.pptx
@@ -6,6 +6,18 @@
   </p:sldMasterIdLst>
   <p:sldIdLst>
     <p:sldId id="258" r:id="rId2"/>
+    <p:sldId id="259" r:id="rId3"/>
+    <p:sldId id="260" r:id="rId4"/>
+    <p:sldId id="261" r:id="rId5"/>
+    <p:sldId id="262" r:id="rId6"/>
+    <p:sldId id="263" r:id="rId7"/>
+    <p:sldId id="264" r:id="rId8"/>
+    <p:sldId id="265" r:id="rId9"/>
+    <p:sldId id="266" r:id="rId10"/>
+    <p:sldId id="267" r:id="rId11"/>
+    <p:sldId id="268" r:id="rId12"/>
+    <p:sldId id="269" r:id="rId13"/>
+    <p:sldId id="270" r:id="rId14"/>
   </p:sldIdLst>
   <p:sldSz cx="12192000" cy="6858000"/>
   <p:notesSz cx="6858000" cy="9144000"/>
@@ -104,6 +116,11 @@
       </a:defRPr>
     </a:lvl9pPr>
   </p:defaultTextStyle>
+  <p:extLst>
+    <p:ext uri="{EFAFB233-063F-42B5-8137-9DF3F51BA10A}">
+      <p15:sldGuideLst xmlns:p15="http://schemas.microsoft.com/office/powerpoint/2012/main"/>
+    </p:ext>
+  </p:extLst>
 </p:presentation>
 </file>
 
@@ -2966,29 +2983,6 @@
       </p:grpSpPr>
       <p:sp>
         <p:nvSpPr>
-          <p:cNvPr id="2" name="제목 1"/>
-          <p:cNvSpPr>
-            <a:spLocks noGrp="1"/>
-          </p:cNvSpPr>
-          <p:nvPr>
-            <p:ph type="title"/>
-          </p:nvPr>
-        </p:nvSpPr>
-        <p:spPr/>
-        <p:txBody>
-          <a:bodyPr/>
-          <a:lstStyle/>
-          <a:p>
-            <a:r>
-              <a:rPr lang="ko-KR" altLang="en-US" smtClean="0"/>
-              <a:t>제작 공정</a:t>
-            </a:r>
-            <a:endParaRPr lang="ko-KR" altLang="en-US"/>
-          </a:p>
-        </p:txBody>
-      </p:sp>
-      <p:sp>
-        <p:nvSpPr>
           <p:cNvPr id="3" name="내용 개체 틀 2"/>
           <p:cNvSpPr>
             <a:spLocks noGrp="1"/>
@@ -2997,11 +2991,194 @@
             <p:ph idx="1"/>
           </p:nvPr>
         </p:nvSpPr>
-        <p:spPr/>
-        <p:txBody>
-          <a:bodyPr/>
-          <a:lstStyle/>
-          <a:p>
+        <p:spPr>
+          <a:xfrm>
+            <a:off x="0" y="1325563"/>
+            <a:ext cx="12192000" cy="5532436"/>
+          </a:xfrm>
+        </p:spPr>
+        <p:txBody>
+          <a:bodyPr>
+            <a:normAutofit/>
+          </a:bodyPr>
+          <a:lstStyle/>
+          <a:p>
+            <a:r>
+              <a:rPr lang="ko-KR" altLang="en-US" smtClean="0"/>
+              <a:t>제작 공정 </a:t>
+            </a:r>
+            <a:r>
+              <a:rPr lang="en-US" altLang="ko-KR" smtClean="0"/>
+              <a:t>: </a:t>
+            </a:r>
+            <a:r>
+              <a:rPr lang="ko-KR" altLang="en-US" smtClean="0"/>
+              <a:t>게임 개발을 의미</a:t>
+            </a:r>
+            <a:endParaRPr lang="en-US" altLang="ko-KR" smtClean="0"/>
+          </a:p>
+          <a:p>
+            <a:endParaRPr lang="en-US" altLang="ko-KR"/>
+          </a:p>
+          <a:p>
+            <a:r>
+              <a:rPr lang="ko-KR" altLang="en-US" smtClean="0"/>
+              <a:t>게임 개발에 대한 직업군</a:t>
+            </a:r>
+            <a:endParaRPr lang="en-US" altLang="ko-KR"/>
+          </a:p>
+          <a:p>
+            <a:pPr marL="0" indent="0">
+              <a:buNone/>
+            </a:pPr>
+            <a:r>
+              <a:rPr lang="en-US" altLang="ko-KR" smtClean="0"/>
+              <a:t>1. ‘</a:t>
+            </a:r>
+            <a:r>
+              <a:rPr lang="ko-KR" altLang="en-US" smtClean="0"/>
+              <a:t>그래픽</a:t>
+            </a:r>
+            <a:r>
+              <a:rPr lang="en-US" altLang="ko-KR" smtClean="0"/>
+              <a:t>’ </a:t>
+            </a:r>
+            <a:r>
+              <a:rPr lang="ko-KR" altLang="en-US" smtClean="0"/>
+              <a:t>관련 </a:t>
+            </a:r>
+            <a:r>
+              <a:rPr lang="en-US" altLang="ko-KR" smtClean="0"/>
+              <a:t>5</a:t>
+            </a:r>
+            <a:r>
+              <a:rPr lang="ko-KR" altLang="en-US" smtClean="0"/>
+              <a:t>가지 직업군</a:t>
+            </a:r>
+            <a:endParaRPr lang="en-US" altLang="ko-KR"/>
+          </a:p>
+          <a:p>
+            <a:pPr marL="914400" lvl="1" indent="-457200">
+              <a:buFont typeface="+mj-lt"/>
+              <a:buAutoNum type="arabicPeriod"/>
+            </a:pPr>
+            <a:r>
+              <a:rPr lang="ko-KR" altLang="en-US" smtClean="0"/>
+              <a:t>원화</a:t>
+            </a:r>
+            <a:r>
+              <a:rPr lang="en-US" altLang="ko-KR" smtClean="0"/>
+              <a:t>(2D)</a:t>
+            </a:r>
+            <a:r>
+              <a:rPr lang="ko-KR" altLang="en-US" smtClean="0"/>
+              <a:t> </a:t>
+            </a:r>
+            <a:r>
+              <a:rPr lang="en-US" altLang="ko-KR" smtClean="0"/>
+              <a:t>(</a:t>
+            </a:r>
+            <a:r>
+              <a:rPr lang="ko-KR" altLang="en-US" smtClean="0"/>
+              <a:t>캐릭터 </a:t>
+            </a:r>
+            <a:r>
+              <a:rPr lang="en-US" altLang="ko-KR" smtClean="0"/>
+              <a:t>/ </a:t>
+            </a:r>
+            <a:r>
+              <a:rPr lang="ko-KR" altLang="en-US" smtClean="0"/>
+              <a:t>배경</a:t>
+            </a:r>
+            <a:r>
+              <a:rPr lang="en-US" altLang="ko-KR" smtClean="0"/>
+              <a:t>)</a:t>
+            </a:r>
+          </a:p>
+          <a:p>
+            <a:pPr marL="914400" lvl="1" indent="-457200">
+              <a:buFont typeface="+mj-lt"/>
+              <a:buAutoNum type="arabicPeriod"/>
+            </a:pPr>
+            <a:r>
+              <a:rPr lang="ko-KR" altLang="en-US" smtClean="0"/>
+              <a:t>모델러</a:t>
+            </a:r>
+            <a:r>
+              <a:rPr lang="en-US" altLang="ko-KR" smtClean="0"/>
+              <a:t>(3D) (</a:t>
+            </a:r>
+            <a:r>
+              <a:rPr lang="ko-KR" altLang="en-US" smtClean="0"/>
+              <a:t>캐릭터 </a:t>
+            </a:r>
+            <a:r>
+              <a:rPr lang="en-US" altLang="ko-KR" smtClean="0"/>
+              <a:t>/ </a:t>
+            </a:r>
+            <a:r>
+              <a:rPr lang="ko-KR" altLang="en-US" smtClean="0"/>
+              <a:t>배경</a:t>
+            </a:r>
+            <a:r>
+              <a:rPr lang="en-US" altLang="ko-KR" smtClean="0"/>
+              <a:t>)</a:t>
+            </a:r>
+            <a:r>
+              <a:rPr lang="ko-KR" altLang="en-US" smtClean="0"/>
+              <a:t> </a:t>
+            </a:r>
+            <a:endParaRPr lang="en-US" altLang="ko-KR"/>
+          </a:p>
+          <a:p>
+            <a:pPr marL="914400" lvl="1" indent="-457200">
+              <a:buFont typeface="+mj-lt"/>
+              <a:buAutoNum type="arabicPeriod"/>
+            </a:pPr>
+            <a:r>
+              <a:rPr lang="ko-KR" altLang="en-US" smtClean="0"/>
+              <a:t>애니메이터</a:t>
+            </a:r>
+            <a:endParaRPr lang="en-US" altLang="ko-KR"/>
+          </a:p>
+          <a:p>
+            <a:pPr marL="914400" lvl="1" indent="-457200">
+              <a:buFont typeface="+mj-lt"/>
+              <a:buAutoNum type="arabicPeriod"/>
+            </a:pPr>
+            <a:r>
+              <a:rPr lang="ko-KR" altLang="en-US" smtClean="0"/>
+              <a:t>이펙터</a:t>
+            </a:r>
+            <a:endParaRPr lang="en-US" altLang="ko-KR"/>
+          </a:p>
+          <a:p>
+            <a:pPr marL="914400" lvl="1" indent="-457200">
+              <a:buFont typeface="+mj-lt"/>
+              <a:buAutoNum type="arabicPeriod"/>
+            </a:pPr>
+            <a:r>
+              <a:rPr lang="en-US" altLang="ko-KR" smtClean="0"/>
+              <a:t>UI </a:t>
+            </a:r>
+            <a:r>
+              <a:rPr lang="ko-KR" altLang="en-US" smtClean="0"/>
+              <a:t>디자이너</a:t>
+            </a:r>
+            <a:endParaRPr lang="en-US" altLang="ko-KR" smtClean="0"/>
+          </a:p>
+          <a:p>
+            <a:pPr marL="914400" lvl="1" indent="-457200">
+              <a:buFont typeface="+mj-lt"/>
+              <a:buAutoNum type="arabicPeriod"/>
+            </a:pPr>
+            <a:endParaRPr lang="en-US" altLang="ko-KR"/>
+          </a:p>
+          <a:p>
+            <a:pPr marL="914400" lvl="1" indent="-457200">
+              <a:buFont typeface="+mj-lt"/>
+              <a:buAutoNum type="arabicPeriod"/>
+            </a:pPr>
             <a:endParaRPr lang="ko-KR" altLang="en-US"/>
           </a:p>
         </p:txBody>
@@ -3057,10 +3234,2515 @@
           </a:p>
         </p:txBody>
       </p:sp>
+      <p:sp>
+        <p:nvSpPr>
+          <p:cNvPr id="6" name="제목 1"/>
+          <p:cNvSpPr txBox="1">
+            <a:spLocks/>
+          </p:cNvSpPr>
+          <p:nvPr/>
+        </p:nvSpPr>
+        <p:spPr>
+          <a:xfrm>
+            <a:off x="0" y="0"/>
+            <a:ext cx="10515600" cy="1325563"/>
+          </a:xfrm>
+          <a:prstGeom prst="rect">
+            <a:avLst/>
+          </a:prstGeom>
+        </p:spPr>
+        <p:txBody>
+          <a:bodyPr vert="horz" lIns="91440" tIns="45720" rIns="91440" bIns="45720" rtlCol="0" anchor="ctr">
+            <a:normAutofit/>
+          </a:bodyPr>
+          <a:lstStyle>
+            <a:lvl1pPr algn="l" defTabSz="914400" rtl="0" eaLnBrk="1" latinLnBrk="1" hangingPunct="1">
+              <a:lnSpc>
+                <a:spcPct val="90000"/>
+              </a:lnSpc>
+              <a:spcBef>
+                <a:spcPct val="0"/>
+              </a:spcBef>
+              <a:buNone/>
+              <a:defRPr sz="4400" kern="1200">
+                <a:solidFill>
+                  <a:schemeClr val="tx1"/>
+                </a:solidFill>
+                <a:latin typeface="+mj-lt"/>
+                <a:ea typeface="+mj-ea"/>
+                <a:cs typeface="+mj-cs"/>
+              </a:defRPr>
+            </a:lvl1pPr>
+          </a:lstStyle>
+          <a:p>
+            <a:r>
+              <a:rPr lang="ko-KR" altLang="en-US" smtClean="0"/>
+              <a:t>제작 공정의 이해</a:t>
+            </a:r>
+            <a:endParaRPr lang="ko-KR" altLang="en-US"/>
+          </a:p>
+        </p:txBody>
+      </p:sp>
     </p:spTree>
     <p:extLst>
       <p:ext uri="{BB962C8B-B14F-4D97-AF65-F5344CB8AC3E}">
         <p14:creationId xmlns:p14="http://schemas.microsoft.com/office/powerpoint/2010/main" val="1475853480"/>
+      </p:ext>
+    </p:extLst>
+  </p:cSld>
+  <p:clrMapOvr>
+    <a:masterClrMapping/>
+  </p:clrMapOvr>
+</p:sld>
+</file>
+
+<file path=ppt/slides/slide10.xml><?xml version="1.0" encoding="utf-8"?>
+<p:sld xmlns:a="http://schemas.openxmlformats.org/drawingml/2006/main" xmlns:r="http://schemas.openxmlformats.org/officeDocument/2006/relationships" xmlns:p="http://schemas.openxmlformats.org/presentationml/2006/main">
+  <p:cSld>
+    <p:spTree>
+      <p:nvGrpSpPr>
+        <p:cNvPr id="1" name=""/>
+        <p:cNvGrpSpPr/>
+        <p:nvPr/>
+      </p:nvGrpSpPr>
+      <p:grpSpPr>
+        <a:xfrm>
+          <a:off x="0" y="0"/>
+          <a:ext cx="0" cy="0"/>
+          <a:chOff x="0" y="0"/>
+          <a:chExt cx="0" cy="0"/>
+        </a:xfrm>
+      </p:grpSpPr>
+      <p:sp>
+        <p:nvSpPr>
+          <p:cNvPr id="2" name="제목 1"/>
+          <p:cNvSpPr>
+            <a:spLocks noGrp="1"/>
+          </p:cNvSpPr>
+          <p:nvPr>
+            <p:ph type="title"/>
+          </p:nvPr>
+        </p:nvSpPr>
+        <p:spPr/>
+        <p:txBody>
+          <a:bodyPr/>
+          <a:lstStyle/>
+          <a:p>
+            <a:r>
+              <a:rPr lang="ko-KR" altLang="en-US"/>
+              <a:t>개발쪽과 관련됐지만 필수는 아닌 직업군</a:t>
+            </a:r>
+          </a:p>
+        </p:txBody>
+      </p:sp>
+      <p:sp>
+        <p:nvSpPr>
+          <p:cNvPr id="3" name="내용 개체 틀 2"/>
+          <p:cNvSpPr>
+            <a:spLocks noGrp="1"/>
+          </p:cNvSpPr>
+          <p:nvPr>
+            <p:ph idx="1"/>
+          </p:nvPr>
+        </p:nvSpPr>
+        <p:spPr/>
+        <p:txBody>
+          <a:bodyPr/>
+          <a:lstStyle/>
+          <a:p>
+            <a:r>
+              <a:rPr lang="ko-KR" altLang="en-US" smtClean="0"/>
+              <a:t>보안팀 </a:t>
+            </a:r>
+            <a:r>
+              <a:rPr lang="en-US" altLang="ko-KR" smtClean="0"/>
+              <a:t>: </a:t>
+            </a:r>
+            <a:r>
+              <a:rPr lang="ko-KR" altLang="en-US" smtClean="0"/>
+              <a:t>데이터들이 외부의 </a:t>
+            </a:r>
+            <a:r>
+              <a:rPr lang="en-US" altLang="ko-KR" smtClean="0"/>
+              <a:t>IDC </a:t>
+            </a:r>
+            <a:r>
+              <a:rPr lang="ko-KR" altLang="en-US" smtClean="0"/>
+              <a:t>센터로 보내지면</a:t>
+            </a:r>
+            <a:r>
+              <a:rPr lang="en-US" altLang="ko-KR" smtClean="0"/>
+              <a:t>, ‘</a:t>
+            </a:r>
+            <a:r>
+              <a:rPr lang="ko-KR" altLang="en-US" b="1" smtClean="0"/>
+              <a:t>물리적인 보안</a:t>
+            </a:r>
+            <a:r>
+              <a:rPr lang="en-US" altLang="ko-KR" b="1" smtClean="0"/>
+              <a:t>’</a:t>
+            </a:r>
+            <a:r>
+              <a:rPr lang="ko-KR" altLang="en-US" smtClean="0"/>
+              <a:t>과 </a:t>
+            </a:r>
+            <a:r>
+              <a:rPr lang="en-US" altLang="ko-KR" smtClean="0"/>
+              <a:t>‘</a:t>
+            </a:r>
+            <a:r>
+              <a:rPr lang="ko-KR" altLang="en-US" b="1" smtClean="0"/>
+              <a:t>네트워크적인 보안</a:t>
+            </a:r>
+            <a:r>
+              <a:rPr lang="en-US" altLang="ko-KR" b="1" smtClean="0"/>
+              <a:t>’</a:t>
+            </a:r>
+            <a:r>
+              <a:rPr lang="en-US" altLang="ko-KR" smtClean="0"/>
+              <a:t>, ‘</a:t>
+            </a:r>
+            <a:r>
+              <a:rPr lang="ko-KR" altLang="en-US" b="1" smtClean="0"/>
+              <a:t>소프트웨어적인 보안</a:t>
+            </a:r>
+            <a:r>
+              <a:rPr lang="en-US" altLang="ko-KR" b="1" smtClean="0"/>
+              <a:t>’</a:t>
+            </a:r>
+            <a:r>
+              <a:rPr lang="ko-KR" altLang="en-US" smtClean="0"/>
+              <a:t>을 모두 한다</a:t>
+            </a:r>
+            <a:r>
+              <a:rPr lang="en-US" altLang="ko-KR" smtClean="0"/>
+              <a:t>.</a:t>
+            </a:r>
+          </a:p>
+          <a:p>
+            <a:r>
+              <a:rPr lang="ko-KR" altLang="en-US" smtClean="0"/>
+              <a:t>넥슨 등 국내 기업들은 </a:t>
+            </a:r>
+            <a:r>
+              <a:rPr lang="en-US" altLang="ko-KR" smtClean="0"/>
+              <a:t>IDC </a:t>
+            </a:r>
+            <a:r>
+              <a:rPr lang="ko-KR" altLang="en-US" smtClean="0"/>
+              <a:t>센터와 계약해서 보안 관리를 한다</a:t>
+            </a:r>
+            <a:r>
+              <a:rPr lang="en-US" altLang="ko-KR" smtClean="0"/>
+              <a:t>.</a:t>
+            </a:r>
+            <a:endParaRPr lang="en-US" altLang="ko-KR"/>
+          </a:p>
+          <a:p>
+            <a:endParaRPr lang="en-US" altLang="ko-KR"/>
+          </a:p>
+          <a:p>
+            <a:r>
+              <a:rPr lang="ko-KR" altLang="en-US"/>
+              <a:t>전산팀 </a:t>
+            </a:r>
+            <a:r>
+              <a:rPr lang="en-US" altLang="ko-KR"/>
+              <a:t>: </a:t>
+            </a:r>
+            <a:r>
+              <a:rPr lang="ko-KR" altLang="en-US"/>
+              <a:t>내 컴퓨터를 관리하는 사람들</a:t>
+            </a:r>
+            <a:endParaRPr lang="en-US" altLang="ko-KR"/>
+          </a:p>
+          <a:p>
+            <a:endParaRPr lang="ko-KR" altLang="en-US"/>
+          </a:p>
+        </p:txBody>
+      </p:sp>
+    </p:spTree>
+    <p:extLst>
+      <p:ext uri="{BB962C8B-B14F-4D97-AF65-F5344CB8AC3E}">
+        <p14:creationId xmlns:p14="http://schemas.microsoft.com/office/powerpoint/2010/main" val="3207466825"/>
+      </p:ext>
+    </p:extLst>
+  </p:cSld>
+  <p:clrMapOvr>
+    <a:masterClrMapping/>
+  </p:clrMapOvr>
+</p:sld>
+</file>
+
+<file path=ppt/slides/slide11.xml><?xml version="1.0" encoding="utf-8"?>
+<p:sld xmlns:a="http://schemas.openxmlformats.org/drawingml/2006/main" xmlns:r="http://schemas.openxmlformats.org/officeDocument/2006/relationships" xmlns:p="http://schemas.openxmlformats.org/presentationml/2006/main">
+  <p:cSld>
+    <p:spTree>
+      <p:nvGrpSpPr>
+        <p:cNvPr id="1" name=""/>
+        <p:cNvGrpSpPr/>
+        <p:nvPr/>
+      </p:nvGrpSpPr>
+      <p:grpSpPr>
+        <a:xfrm>
+          <a:off x="0" y="0"/>
+          <a:ext cx="0" cy="0"/>
+          <a:chOff x="0" y="0"/>
+          <a:chExt cx="0" cy="0"/>
+        </a:xfrm>
+      </p:grpSpPr>
+      <p:sp>
+        <p:nvSpPr>
+          <p:cNvPr id="2" name="제목 1"/>
+          <p:cNvSpPr>
+            <a:spLocks noGrp="1"/>
+          </p:cNvSpPr>
+          <p:nvPr>
+            <p:ph type="title"/>
+          </p:nvPr>
+        </p:nvSpPr>
+        <p:spPr/>
+        <p:txBody>
+          <a:bodyPr/>
+          <a:lstStyle/>
+          <a:p>
+            <a:r>
+              <a:rPr lang="ko-KR" altLang="en-US"/>
+              <a:t>개발쪽과 관련됐지만 필수는 </a:t>
+            </a:r>
+            <a:r>
+              <a:rPr lang="ko-KR" altLang="en-US"/>
+              <a:t>아닌 </a:t>
+            </a:r>
+            <a:r>
+              <a:rPr lang="ko-KR" altLang="en-US" smtClean="0"/>
+              <a:t>직업군</a:t>
+            </a:r>
+            <a:r>
+              <a:rPr lang="en-US" altLang="ko-KR" smtClean="0"/>
+              <a:t/>
+            </a:r>
+            <a:br>
+              <a:rPr lang="en-US" altLang="ko-KR" smtClean="0"/>
+            </a:br>
+            <a:r>
+              <a:rPr lang="en-US" altLang="ko-KR" smtClean="0"/>
+              <a:t>- </a:t>
+            </a:r>
+            <a:r>
+              <a:rPr lang="ko-KR" altLang="en-US" smtClean="0"/>
+              <a:t>사업 </a:t>
+            </a:r>
+            <a:r>
+              <a:rPr lang="en-US" altLang="ko-KR" smtClean="0"/>
+              <a:t>/ </a:t>
+            </a:r>
+            <a:r>
+              <a:rPr lang="ko-KR" altLang="en-US" smtClean="0"/>
+              <a:t>서비스 관련 직군</a:t>
+            </a:r>
+            <a:endParaRPr lang="ko-KR" altLang="en-US"/>
+          </a:p>
+        </p:txBody>
+      </p:sp>
+      <p:sp>
+        <p:nvSpPr>
+          <p:cNvPr id="3" name="내용 개체 틀 2"/>
+          <p:cNvSpPr>
+            <a:spLocks noGrp="1"/>
+          </p:cNvSpPr>
+          <p:nvPr>
+            <p:ph idx="1"/>
+          </p:nvPr>
+        </p:nvSpPr>
+        <p:spPr/>
+        <p:txBody>
+          <a:bodyPr/>
+          <a:lstStyle/>
+          <a:p>
+            <a:r>
+              <a:rPr lang="ko-KR" altLang="en-US" smtClean="0"/>
+              <a:t>사업팀 </a:t>
+            </a:r>
+            <a:r>
+              <a:rPr lang="en-US" altLang="ko-KR" smtClean="0"/>
+              <a:t>: </a:t>
+            </a:r>
+            <a:r>
+              <a:rPr lang="ko-KR" altLang="en-US" smtClean="0"/>
+              <a:t>홍보 및 개발 비용을 산정</a:t>
+            </a:r>
+            <a:r>
+              <a:rPr lang="en-US" altLang="ko-KR" smtClean="0"/>
+              <a:t>. </a:t>
+            </a:r>
+            <a:r>
+              <a:rPr lang="ko-KR" altLang="en-US" smtClean="0"/>
+              <a:t>수익성 관리를 한다</a:t>
+            </a:r>
+            <a:r>
+              <a:rPr lang="en-US" altLang="ko-KR" smtClean="0"/>
+              <a:t>. </a:t>
+            </a:r>
+            <a:r>
+              <a:rPr lang="ko-KR" altLang="en-US" smtClean="0"/>
+              <a:t>사업팀이 이 게임 재미없다고 판단하면 게임이 없어지기도 한다</a:t>
+            </a:r>
+            <a:r>
+              <a:rPr lang="en-US" altLang="ko-KR" smtClean="0"/>
+              <a:t>.</a:t>
+            </a:r>
+          </a:p>
+          <a:p>
+            <a:r>
+              <a:rPr lang="ko-KR" altLang="en-US" smtClean="0"/>
+              <a:t>사업 개발</a:t>
+            </a:r>
+            <a:r>
+              <a:rPr lang="en-US" altLang="ko-KR" smtClean="0"/>
+              <a:t>, </a:t>
+            </a:r>
+            <a:r>
+              <a:rPr lang="ko-KR" altLang="en-US" smtClean="0"/>
+              <a:t>마켓팅</a:t>
+            </a:r>
+            <a:r>
+              <a:rPr lang="en-US" altLang="ko-KR" smtClean="0"/>
+              <a:t>, </a:t>
+            </a:r>
+            <a:r>
+              <a:rPr lang="ko-KR" altLang="en-US" smtClean="0"/>
+              <a:t>홍보</a:t>
+            </a:r>
+            <a:r>
+              <a:rPr lang="en-US" altLang="ko-KR" smtClean="0"/>
+              <a:t>, </a:t>
+            </a:r>
+            <a:r>
+              <a:rPr lang="ko-KR" altLang="en-US" smtClean="0"/>
+              <a:t>해외 사업팀으로 세분화 된다</a:t>
+            </a:r>
+            <a:r>
+              <a:rPr lang="en-US" altLang="ko-KR" smtClean="0"/>
+              <a:t>.</a:t>
+            </a:r>
+          </a:p>
+          <a:p>
+            <a:r>
+              <a:rPr lang="ko-KR" altLang="en-US" smtClean="0"/>
+              <a:t>사업팀이 수익 관리를 통한 게임에 대한 </a:t>
+            </a:r>
+            <a:r>
+              <a:rPr lang="en-US" altLang="ko-KR" smtClean="0"/>
+              <a:t>‘</a:t>
+            </a:r>
+            <a:r>
+              <a:rPr lang="ko-KR" altLang="en-US" smtClean="0"/>
+              <a:t>가치 판단</a:t>
+            </a:r>
+            <a:r>
+              <a:rPr lang="en-US" altLang="ko-KR" smtClean="0"/>
+              <a:t>’</a:t>
+            </a:r>
+            <a:r>
+              <a:rPr lang="ko-KR" altLang="en-US" smtClean="0"/>
+              <a:t>을 한다</a:t>
+            </a:r>
+            <a:r>
+              <a:rPr lang="en-US" altLang="ko-KR" smtClean="0"/>
+              <a:t>.</a:t>
+            </a:r>
+          </a:p>
+          <a:p>
+            <a:endParaRPr lang="en-US" altLang="ko-KR"/>
+          </a:p>
+          <a:p>
+            <a:r>
+              <a:rPr lang="ko-KR" altLang="en-US" smtClean="0"/>
+              <a:t>여기까지가 게임에 직</a:t>
+            </a:r>
+            <a:r>
+              <a:rPr lang="en-US" altLang="ko-KR" smtClean="0"/>
+              <a:t>.</a:t>
+            </a:r>
+            <a:r>
+              <a:rPr lang="ko-KR" altLang="en-US" smtClean="0"/>
+              <a:t>간접적인 관련이 있는 직업군들</a:t>
+            </a:r>
+            <a:endParaRPr lang="ko-KR" altLang="en-US"/>
+          </a:p>
+        </p:txBody>
+      </p:sp>
+    </p:spTree>
+    <p:extLst>
+      <p:ext uri="{BB962C8B-B14F-4D97-AF65-F5344CB8AC3E}">
+        <p14:creationId xmlns:p14="http://schemas.microsoft.com/office/powerpoint/2010/main" val="907578403"/>
+      </p:ext>
+    </p:extLst>
+  </p:cSld>
+  <p:clrMapOvr>
+    <a:masterClrMapping/>
+  </p:clrMapOvr>
+</p:sld>
+</file>
+
+<file path=ppt/slides/slide12.xml><?xml version="1.0" encoding="utf-8"?>
+<p:sld xmlns:a="http://schemas.openxmlformats.org/drawingml/2006/main" xmlns:r="http://schemas.openxmlformats.org/officeDocument/2006/relationships" xmlns:p="http://schemas.openxmlformats.org/presentationml/2006/main">
+  <p:cSld>
+    <p:spTree>
+      <p:nvGrpSpPr>
+        <p:cNvPr id="1" name=""/>
+        <p:cNvGrpSpPr/>
+        <p:nvPr/>
+      </p:nvGrpSpPr>
+      <p:grpSpPr>
+        <a:xfrm>
+          <a:off x="0" y="0"/>
+          <a:ext cx="0" cy="0"/>
+          <a:chOff x="0" y="0"/>
+          <a:chExt cx="0" cy="0"/>
+        </a:xfrm>
+      </p:grpSpPr>
+      <p:sp>
+        <p:nvSpPr>
+          <p:cNvPr id="2" name="제목 1"/>
+          <p:cNvSpPr>
+            <a:spLocks noGrp="1"/>
+          </p:cNvSpPr>
+          <p:nvPr>
+            <p:ph type="title"/>
+          </p:nvPr>
+        </p:nvSpPr>
+        <p:spPr/>
+        <p:txBody>
+          <a:bodyPr/>
+          <a:lstStyle/>
+          <a:p>
+            <a:r>
+              <a:rPr lang="en-US" altLang="ko-KR" smtClean="0"/>
+              <a:t>+ </a:t>
+            </a:r>
+            <a:r>
+              <a:rPr lang="ko-KR" altLang="en-US" smtClean="0"/>
+              <a:t>추가</a:t>
+            </a:r>
+            <a:endParaRPr lang="ko-KR" altLang="en-US"/>
+          </a:p>
+        </p:txBody>
+      </p:sp>
+      <p:sp>
+        <p:nvSpPr>
+          <p:cNvPr id="3" name="내용 개체 틀 2"/>
+          <p:cNvSpPr>
+            <a:spLocks noGrp="1"/>
+          </p:cNvSpPr>
+          <p:nvPr>
+            <p:ph idx="1"/>
+          </p:nvPr>
+        </p:nvSpPr>
+        <p:spPr/>
+        <p:txBody>
+          <a:bodyPr>
+            <a:normAutofit fontScale="77500" lnSpcReduction="20000"/>
+          </a:bodyPr>
+          <a:lstStyle/>
+          <a:p>
+            <a:r>
+              <a:rPr lang="ko-KR" altLang="en-US" smtClean="0"/>
+              <a:t>일정 관리 용도로 외주를 맡길 때가 있다</a:t>
+            </a:r>
+            <a:r>
+              <a:rPr lang="en-US" altLang="ko-KR" smtClean="0"/>
+              <a:t>.</a:t>
+            </a:r>
+          </a:p>
+          <a:p>
+            <a:r>
+              <a:rPr lang="en-US" altLang="ko-KR" smtClean="0"/>
+              <a:t>PM</a:t>
+            </a:r>
+            <a:r>
+              <a:rPr lang="ko-KR" altLang="en-US" smtClean="0"/>
+              <a:t>들이 외주 계약 관련 일들을 한다</a:t>
+            </a:r>
+            <a:r>
+              <a:rPr lang="en-US" altLang="ko-KR" smtClean="0"/>
+              <a:t>.</a:t>
+            </a:r>
+          </a:p>
+          <a:p>
+            <a:r>
+              <a:rPr lang="ko-KR" altLang="en-US" smtClean="0"/>
+              <a:t>이들도 우리 게임에 도움을 준다</a:t>
+            </a:r>
+            <a:r>
+              <a:rPr lang="en-US" altLang="ko-KR" smtClean="0"/>
+              <a:t>.</a:t>
+            </a:r>
+          </a:p>
+          <a:p>
+            <a:endParaRPr lang="en-US" altLang="ko-KR"/>
+          </a:p>
+          <a:p>
+            <a:r>
+              <a:rPr lang="en-US" altLang="ko-KR" smtClean="0"/>
+              <a:t>CRM : </a:t>
+            </a:r>
+            <a:r>
+              <a:rPr lang="ko-KR" altLang="en-US" smtClean="0"/>
+              <a:t>플랫폼</a:t>
+            </a:r>
+            <a:r>
+              <a:rPr lang="en-US" altLang="ko-KR" smtClean="0"/>
+              <a:t>, </a:t>
+            </a:r>
+            <a:r>
+              <a:rPr lang="ko-KR" altLang="en-US" smtClean="0"/>
+              <a:t>사이트 관리</a:t>
+            </a:r>
+            <a:r>
+              <a:rPr lang="en-US" altLang="ko-KR" smtClean="0"/>
+              <a:t>. </a:t>
+            </a:r>
+            <a:r>
+              <a:rPr lang="ko-KR" altLang="en-US" smtClean="0"/>
+              <a:t>고객과의 소통을 관리</a:t>
+            </a:r>
+            <a:r>
+              <a:rPr lang="en-US" altLang="ko-KR" smtClean="0"/>
+              <a:t>.</a:t>
+            </a:r>
+          </a:p>
+          <a:p>
+            <a:r>
+              <a:rPr lang="en-US" altLang="ko-KR" smtClean="0"/>
+              <a:t>GM, CS : </a:t>
+            </a:r>
+            <a:r>
+              <a:rPr lang="ko-KR" altLang="en-US" smtClean="0"/>
+              <a:t>이 영역 안에서 활동하는 사람들</a:t>
+            </a:r>
+            <a:r>
+              <a:rPr lang="en-US" altLang="ko-KR" smtClean="0"/>
+              <a:t>. </a:t>
+            </a:r>
+            <a:r>
+              <a:rPr lang="ko-KR" altLang="en-US" smtClean="0"/>
+              <a:t>고객과의 관계 형성 관리를 도와준다</a:t>
+            </a:r>
+            <a:r>
+              <a:rPr lang="en-US" altLang="ko-KR" smtClean="0"/>
+              <a:t>.</a:t>
+            </a:r>
+          </a:p>
+          <a:p>
+            <a:endParaRPr lang="en-US" altLang="ko-KR"/>
+          </a:p>
+          <a:p>
+            <a:r>
+              <a:rPr lang="ko-KR" altLang="en-US" smtClean="0"/>
+              <a:t>게임 운영팀 </a:t>
+            </a:r>
+            <a:r>
+              <a:rPr lang="en-US" altLang="ko-KR" smtClean="0"/>
+              <a:t>: </a:t>
+            </a:r>
+            <a:r>
+              <a:rPr lang="ko-KR" altLang="en-US" smtClean="0"/>
+              <a:t>전산팀 </a:t>
+            </a:r>
+            <a:r>
+              <a:rPr lang="en-US" altLang="ko-KR" smtClean="0"/>
+              <a:t>+ CRM(GM, CS)</a:t>
+            </a:r>
+          </a:p>
+          <a:p>
+            <a:endParaRPr lang="en-US" altLang="ko-KR"/>
+          </a:p>
+          <a:p>
+            <a:r>
+              <a:rPr lang="ko-KR" altLang="en-US" smtClean="0"/>
+              <a:t>외국에서는 </a:t>
+            </a:r>
+            <a:r>
+              <a:rPr lang="en-US" altLang="ko-KR" smtClean="0"/>
+              <a:t>TA</a:t>
+            </a:r>
+            <a:r>
+              <a:rPr lang="ko-KR" altLang="en-US" smtClean="0"/>
+              <a:t>가 중요하다</a:t>
+            </a:r>
+            <a:r>
+              <a:rPr lang="en-US" altLang="ko-KR" smtClean="0"/>
+              <a:t>. </a:t>
+            </a:r>
+            <a:r>
+              <a:rPr lang="ko-KR" altLang="en-US" smtClean="0"/>
+              <a:t>테크니컬 아티스트</a:t>
+            </a:r>
+            <a:r>
+              <a:rPr lang="en-US" altLang="ko-KR" smtClean="0"/>
+              <a:t>. </a:t>
+            </a:r>
+            <a:r>
+              <a:rPr lang="ko-KR" altLang="en-US" smtClean="0"/>
+              <a:t>그래픽과 프로그램을 조율한다</a:t>
+            </a:r>
+            <a:r>
+              <a:rPr lang="en-US" altLang="ko-KR" smtClean="0"/>
+              <a:t>. </a:t>
+            </a:r>
+            <a:r>
+              <a:rPr lang="ko-KR" altLang="en-US" smtClean="0"/>
+              <a:t>한국에는 잘하는 </a:t>
+            </a:r>
+            <a:r>
+              <a:rPr lang="en-US" altLang="ko-KR" smtClean="0"/>
+              <a:t>TA</a:t>
+            </a:r>
+            <a:r>
+              <a:rPr lang="ko-KR" altLang="en-US" smtClean="0"/>
+              <a:t>가 많이 없다</a:t>
+            </a:r>
+            <a:r>
+              <a:rPr lang="en-US" altLang="ko-KR" smtClean="0"/>
+              <a:t>. </a:t>
+            </a:r>
+            <a:r>
+              <a:rPr lang="ko-KR" altLang="en-US" smtClean="0"/>
+              <a:t>프로그램도 알아야 되고 그래픽도 알아야 한다</a:t>
+            </a:r>
+            <a:r>
+              <a:rPr lang="en-US" altLang="ko-KR" smtClean="0"/>
+              <a:t>. </a:t>
+            </a:r>
+            <a:r>
+              <a:rPr lang="ko-KR" altLang="en-US" smtClean="0"/>
+              <a:t>한국에서는 이펙트 디자이너가 한다</a:t>
+            </a:r>
+            <a:r>
+              <a:rPr lang="en-US" altLang="ko-KR" smtClean="0"/>
+              <a:t>.</a:t>
+            </a:r>
+            <a:endParaRPr lang="ko-KR" altLang="en-US"/>
+          </a:p>
+        </p:txBody>
+      </p:sp>
+    </p:spTree>
+    <p:extLst>
+      <p:ext uri="{BB962C8B-B14F-4D97-AF65-F5344CB8AC3E}">
+        <p14:creationId xmlns:p14="http://schemas.microsoft.com/office/powerpoint/2010/main" val="988304061"/>
+      </p:ext>
+    </p:extLst>
+  </p:cSld>
+  <p:clrMapOvr>
+    <a:masterClrMapping/>
+  </p:clrMapOvr>
+</p:sld>
+</file>
+
+<file path=ppt/slides/slide13.xml><?xml version="1.0" encoding="utf-8"?>
+<p:sld xmlns:a="http://schemas.openxmlformats.org/drawingml/2006/main" xmlns:r="http://schemas.openxmlformats.org/officeDocument/2006/relationships" xmlns:p="http://schemas.openxmlformats.org/presentationml/2006/main">
+  <p:cSld>
+    <p:spTree>
+      <p:nvGrpSpPr>
+        <p:cNvPr id="1" name=""/>
+        <p:cNvGrpSpPr/>
+        <p:nvPr/>
+      </p:nvGrpSpPr>
+      <p:grpSpPr>
+        <a:xfrm>
+          <a:off x="0" y="0"/>
+          <a:ext cx="0" cy="0"/>
+          <a:chOff x="0" y="0"/>
+          <a:chExt cx="0" cy="0"/>
+        </a:xfrm>
+      </p:grpSpPr>
+      <p:sp>
+        <p:nvSpPr>
+          <p:cNvPr id="2" name="제목 1"/>
+          <p:cNvSpPr>
+            <a:spLocks noGrp="1"/>
+          </p:cNvSpPr>
+          <p:nvPr>
+            <p:ph type="title"/>
+          </p:nvPr>
+        </p:nvSpPr>
+        <p:spPr/>
+        <p:txBody>
+          <a:bodyPr/>
+          <a:lstStyle/>
+          <a:p>
+            <a:r>
+              <a:rPr lang="en-US" altLang="ko-KR" smtClean="0"/>
+              <a:t>AI</a:t>
+            </a:r>
+            <a:endParaRPr lang="ko-KR" altLang="en-US"/>
+          </a:p>
+        </p:txBody>
+      </p:sp>
+      <p:sp>
+        <p:nvSpPr>
+          <p:cNvPr id="3" name="내용 개체 틀 2"/>
+          <p:cNvSpPr>
+            <a:spLocks noGrp="1"/>
+          </p:cNvSpPr>
+          <p:nvPr>
+            <p:ph idx="1"/>
+          </p:nvPr>
+        </p:nvSpPr>
+        <p:spPr/>
+        <p:txBody>
+          <a:bodyPr>
+            <a:normAutofit lnSpcReduction="10000"/>
+          </a:bodyPr>
+          <a:lstStyle/>
+          <a:p>
+            <a:r>
+              <a:rPr lang="en-US" altLang="ko-KR" smtClean="0"/>
+              <a:t>AI</a:t>
+            </a:r>
+            <a:r>
+              <a:rPr lang="ko-KR" altLang="en-US" smtClean="0"/>
+              <a:t>가 모든 포지션을 대체하고 있다</a:t>
+            </a:r>
+            <a:r>
+              <a:rPr lang="en-US" altLang="ko-KR" smtClean="0"/>
+              <a:t>.</a:t>
+            </a:r>
+          </a:p>
+          <a:p>
+            <a:endParaRPr lang="en-US" altLang="ko-KR"/>
+          </a:p>
+          <a:p>
+            <a:r>
+              <a:rPr lang="en-US" altLang="ko-KR" smtClean="0"/>
+              <a:t>Meshy : </a:t>
+            </a:r>
+            <a:r>
+              <a:rPr lang="ko-KR" altLang="en-US" smtClean="0"/>
+              <a:t>원화를 </a:t>
+            </a:r>
+            <a:r>
+              <a:rPr lang="en-US" altLang="ko-KR" smtClean="0"/>
+              <a:t>3D</a:t>
+            </a:r>
+            <a:r>
+              <a:rPr lang="ko-KR" altLang="en-US" smtClean="0"/>
+              <a:t>로 모델링하는 것</a:t>
+            </a:r>
+            <a:r>
+              <a:rPr lang="en-US" altLang="ko-KR" smtClean="0"/>
+              <a:t>.</a:t>
+            </a:r>
+          </a:p>
+          <a:p>
+            <a:endParaRPr lang="en-US" altLang="ko-KR"/>
+          </a:p>
+          <a:p>
+            <a:r>
+              <a:rPr lang="ko-KR" altLang="en-US" smtClean="0"/>
+              <a:t>로우폴</a:t>
+            </a:r>
+            <a:r>
+              <a:rPr lang="en-US" altLang="ko-KR" smtClean="0"/>
+              <a:t>, </a:t>
+            </a:r>
+            <a:r>
+              <a:rPr lang="ko-KR" altLang="en-US" smtClean="0"/>
+              <a:t>하이폴</a:t>
+            </a:r>
+            <a:r>
+              <a:rPr lang="en-US" altLang="ko-KR" smtClean="0"/>
+              <a:t>, </a:t>
+            </a:r>
+            <a:r>
+              <a:rPr lang="ko-KR" altLang="en-US" smtClean="0"/>
+              <a:t>폴리곤이란 뭔지 찾아보기</a:t>
+            </a:r>
+            <a:r>
+              <a:rPr lang="en-US" altLang="ko-KR" smtClean="0"/>
+              <a:t>.</a:t>
+            </a:r>
+          </a:p>
+          <a:p>
+            <a:endParaRPr lang="en-US" altLang="ko-KR"/>
+          </a:p>
+          <a:p>
+            <a:r>
+              <a:rPr lang="en-US" altLang="ko-KR" smtClean="0"/>
+              <a:t>SUNO : </a:t>
+            </a:r>
+            <a:r>
+              <a:rPr lang="ko-KR" altLang="en-US" smtClean="0"/>
+              <a:t>배경음악 제작</a:t>
+            </a:r>
+            <a:endParaRPr lang="en-US" altLang="ko-KR" smtClean="0"/>
+          </a:p>
+          <a:p>
+            <a:endParaRPr lang="en-US" altLang="ko-KR"/>
+          </a:p>
+          <a:p>
+            <a:r>
+              <a:rPr lang="en-US" altLang="ko-KR" smtClean="0"/>
+              <a:t>ElevenLabs : </a:t>
+            </a:r>
+            <a:r>
+              <a:rPr lang="ko-KR" altLang="en-US" smtClean="0"/>
+              <a:t>음성 제작</a:t>
+            </a:r>
+            <a:endParaRPr lang="ko-KR" altLang="en-US"/>
+          </a:p>
+        </p:txBody>
+      </p:sp>
+    </p:spTree>
+    <p:extLst>
+      <p:ext uri="{BB962C8B-B14F-4D97-AF65-F5344CB8AC3E}">
+        <p14:creationId xmlns:p14="http://schemas.microsoft.com/office/powerpoint/2010/main" val="2443244537"/>
+      </p:ext>
+    </p:extLst>
+  </p:cSld>
+  <p:clrMapOvr>
+    <a:masterClrMapping/>
+  </p:clrMapOvr>
+</p:sld>
+</file>
+
+<file path=ppt/slides/slide2.xml><?xml version="1.0" encoding="utf-8"?>
+<p:sld xmlns:a="http://schemas.openxmlformats.org/drawingml/2006/main" xmlns:r="http://schemas.openxmlformats.org/officeDocument/2006/relationships" xmlns:p="http://schemas.openxmlformats.org/presentationml/2006/main">
+  <p:cSld>
+    <p:spTree>
+      <p:nvGrpSpPr>
+        <p:cNvPr id="1" name=""/>
+        <p:cNvGrpSpPr/>
+        <p:nvPr/>
+      </p:nvGrpSpPr>
+      <p:grpSpPr>
+        <a:xfrm>
+          <a:off x="0" y="0"/>
+          <a:ext cx="0" cy="0"/>
+          <a:chOff x="0" y="0"/>
+          <a:chExt cx="0" cy="0"/>
+        </a:xfrm>
+      </p:grpSpPr>
+      <p:sp>
+        <p:nvSpPr>
+          <p:cNvPr id="2" name="제목 1"/>
+          <p:cNvSpPr>
+            <a:spLocks noGrp="1"/>
+          </p:cNvSpPr>
+          <p:nvPr>
+            <p:ph type="title"/>
+          </p:nvPr>
+        </p:nvSpPr>
+        <p:spPr>
+          <a:xfrm>
+            <a:off x="0" y="0"/>
+            <a:ext cx="10515600" cy="1325563"/>
+          </a:xfrm>
+        </p:spPr>
+        <p:txBody>
+          <a:bodyPr/>
+          <a:lstStyle/>
+          <a:p>
+            <a:r>
+              <a:rPr lang="ko-KR" altLang="en-US" smtClean="0"/>
+              <a:t>제작 </a:t>
+            </a:r>
+            <a:r>
+              <a:rPr lang="ko-KR" altLang="en-US" smtClean="0"/>
+              <a:t>공정의 이해</a:t>
+            </a:r>
+            <a:endParaRPr lang="ko-KR" altLang="en-US"/>
+          </a:p>
+        </p:txBody>
+      </p:sp>
+      <p:sp>
+        <p:nvSpPr>
+          <p:cNvPr id="3" name="내용 개체 틀 2"/>
+          <p:cNvSpPr>
+            <a:spLocks noGrp="1"/>
+          </p:cNvSpPr>
+          <p:nvPr>
+            <p:ph idx="1"/>
+          </p:nvPr>
+        </p:nvSpPr>
+        <p:spPr>
+          <a:xfrm>
+            <a:off x="0" y="1325563"/>
+            <a:ext cx="12192000" cy="5532436"/>
+          </a:xfrm>
+        </p:spPr>
+        <p:txBody>
+          <a:bodyPr>
+            <a:normAutofit/>
+          </a:bodyPr>
+          <a:lstStyle/>
+          <a:p>
+            <a:pPr marL="0" indent="0">
+              <a:buNone/>
+            </a:pPr>
+            <a:r>
+              <a:rPr lang="en-US" altLang="ko-KR" smtClean="0"/>
+              <a:t>2. ‘</a:t>
+            </a:r>
+            <a:r>
+              <a:rPr lang="ko-KR" altLang="en-US" smtClean="0"/>
+              <a:t>프로그램</a:t>
+            </a:r>
+            <a:r>
+              <a:rPr lang="en-US" altLang="ko-KR" smtClean="0"/>
+              <a:t>’ </a:t>
+            </a:r>
+            <a:r>
+              <a:rPr lang="ko-KR" altLang="en-US" smtClean="0"/>
+              <a:t>관련 </a:t>
+            </a:r>
+            <a:r>
+              <a:rPr lang="en-US" altLang="ko-KR"/>
+              <a:t>3</a:t>
+            </a:r>
+            <a:r>
+              <a:rPr lang="ko-KR" altLang="en-US" smtClean="0"/>
+              <a:t>가지 직업군</a:t>
+            </a:r>
+            <a:endParaRPr lang="en-US" altLang="ko-KR" smtClean="0"/>
+          </a:p>
+          <a:p>
+            <a:pPr marL="914400" lvl="1" indent="-457200">
+              <a:buFont typeface="+mj-lt"/>
+              <a:buAutoNum type="arabicPeriod"/>
+            </a:pPr>
+            <a:r>
+              <a:rPr lang="ko-KR" altLang="en-US"/>
+              <a:t>클라이언트 프로그램</a:t>
+            </a:r>
+            <a:endParaRPr lang="en-US" altLang="ko-KR"/>
+          </a:p>
+          <a:p>
+            <a:pPr marL="914400" lvl="1" indent="-457200">
+              <a:buFont typeface="+mj-lt"/>
+              <a:buAutoNum type="arabicPeriod"/>
+            </a:pPr>
+            <a:r>
+              <a:rPr lang="ko-KR" altLang="en-US"/>
+              <a:t>서버 프로그램</a:t>
+            </a:r>
+            <a:endParaRPr lang="en-US" altLang="ko-KR"/>
+          </a:p>
+          <a:p>
+            <a:pPr marL="914400" lvl="1" indent="-457200">
+              <a:buFont typeface="+mj-lt"/>
+              <a:buAutoNum type="arabicPeriod"/>
+            </a:pPr>
+            <a:r>
+              <a:rPr lang="ko-KR" altLang="en-US"/>
+              <a:t>게임 엔진 프로그램</a:t>
+            </a:r>
+            <a:endParaRPr lang="en-US" altLang="ko-KR"/>
+          </a:p>
+          <a:p>
+            <a:pPr marL="0" indent="0">
+              <a:buNone/>
+            </a:pPr>
+            <a:endParaRPr lang="en-US" altLang="ko-KR"/>
+          </a:p>
+          <a:p>
+            <a:pPr marL="0" indent="0">
+              <a:buNone/>
+            </a:pPr>
+            <a:r>
+              <a:rPr lang="en-US" altLang="ko-KR" smtClean="0"/>
+              <a:t>3. </a:t>
+            </a:r>
+            <a:r>
+              <a:rPr lang="en-US" altLang="ko-KR"/>
+              <a:t>‘</a:t>
+            </a:r>
+            <a:r>
+              <a:rPr lang="ko-KR" altLang="en-US"/>
+              <a:t>게임 디자이너 </a:t>
+            </a:r>
+            <a:r>
+              <a:rPr lang="en-US" altLang="ko-KR"/>
+              <a:t>(</a:t>
+            </a:r>
+            <a:r>
+              <a:rPr lang="ko-KR" altLang="en-US"/>
+              <a:t>기획자</a:t>
+            </a:r>
+            <a:r>
+              <a:rPr lang="en-US" altLang="ko-KR"/>
+              <a:t>)’ </a:t>
+            </a:r>
+            <a:r>
+              <a:rPr lang="ko-KR" altLang="en-US"/>
+              <a:t>관련 </a:t>
+            </a:r>
+            <a:r>
+              <a:rPr lang="en-US" altLang="ko-KR"/>
+              <a:t>7</a:t>
+            </a:r>
+            <a:r>
+              <a:rPr lang="ko-KR" altLang="en-US"/>
+              <a:t>가지 직업군</a:t>
+            </a:r>
+            <a:endParaRPr lang="en-US" altLang="ko-KR"/>
+          </a:p>
+          <a:p>
+            <a:pPr marL="914400" lvl="1" indent="-457200">
+              <a:buFont typeface="+mj-lt"/>
+              <a:buAutoNum type="arabicPeriod"/>
+            </a:pPr>
+            <a:r>
+              <a:rPr lang="ko-KR" altLang="en-US"/>
+              <a:t>시나리오 담당</a:t>
+            </a:r>
+            <a:endParaRPr lang="en-US" altLang="ko-KR"/>
+          </a:p>
+          <a:p>
+            <a:pPr marL="914400" lvl="1" indent="-457200">
+              <a:buFont typeface="+mj-lt"/>
+              <a:buAutoNum type="arabicPeriod"/>
+            </a:pPr>
+            <a:r>
+              <a:rPr lang="ko-KR" altLang="en-US"/>
+              <a:t>설정 담당</a:t>
+            </a:r>
+            <a:endParaRPr lang="en-US" altLang="ko-KR"/>
+          </a:p>
+          <a:p>
+            <a:pPr marL="914400" lvl="1" indent="-457200">
+              <a:buFont typeface="+mj-lt"/>
+              <a:buAutoNum type="arabicPeriod"/>
+            </a:pPr>
+            <a:r>
+              <a:rPr lang="ko-KR" altLang="en-US"/>
+              <a:t>레벨 담당</a:t>
+            </a:r>
+            <a:endParaRPr lang="en-US" altLang="ko-KR"/>
+          </a:p>
+          <a:p>
+            <a:pPr marL="914400" lvl="1" indent="-457200">
+              <a:buFont typeface="+mj-lt"/>
+              <a:buAutoNum type="arabicPeriod"/>
+            </a:pPr>
+            <a:r>
+              <a:rPr lang="ko-KR" altLang="en-US"/>
+              <a:t>퀘스트 담당</a:t>
+            </a:r>
+            <a:endParaRPr lang="en-US" altLang="ko-KR"/>
+          </a:p>
+          <a:p>
+            <a:pPr marL="914400" lvl="1" indent="-457200">
+              <a:buFont typeface="+mj-lt"/>
+              <a:buAutoNum type="arabicPeriod"/>
+              <a:tabLst>
+                <a:tab pos="4937125" algn="l"/>
+              </a:tabLst>
+            </a:pPr>
+            <a:r>
+              <a:rPr lang="ko-KR" altLang="en-US"/>
+              <a:t>밸런스 담당</a:t>
+            </a:r>
+            <a:endParaRPr lang="en-US" altLang="ko-KR"/>
+          </a:p>
+          <a:p>
+            <a:pPr marL="914400" lvl="1" indent="-457200">
+              <a:buFont typeface="+mj-lt"/>
+              <a:buAutoNum type="arabicPeriod"/>
+            </a:pPr>
+            <a:r>
+              <a:rPr lang="ko-KR" altLang="en-US"/>
+              <a:t>시스템 담당</a:t>
+            </a:r>
+            <a:endParaRPr lang="en-US" altLang="ko-KR"/>
+          </a:p>
+          <a:p>
+            <a:pPr marL="914400" lvl="1" indent="-457200">
+              <a:buFont typeface="+mj-lt"/>
+              <a:buAutoNum type="arabicPeriod"/>
+            </a:pPr>
+            <a:r>
+              <a:rPr lang="ko-KR" altLang="en-US"/>
+              <a:t>커뮤니티 담당</a:t>
+            </a:r>
+            <a:endParaRPr lang="en-US" altLang="ko-KR"/>
+          </a:p>
+          <a:p>
+            <a:pPr marL="0" indent="0">
+              <a:buNone/>
+            </a:pPr>
+            <a:endParaRPr lang="en-US" altLang="ko-KR"/>
+          </a:p>
+          <a:p>
+            <a:pPr marL="457200" lvl="1" indent="0">
+              <a:buNone/>
+            </a:pPr>
+            <a:endParaRPr lang="en-US" altLang="ko-KR"/>
+          </a:p>
+        </p:txBody>
+      </p:sp>
+    </p:spTree>
+    <p:extLst>
+      <p:ext uri="{BB962C8B-B14F-4D97-AF65-F5344CB8AC3E}">
+        <p14:creationId xmlns:p14="http://schemas.microsoft.com/office/powerpoint/2010/main" val="1339401241"/>
+      </p:ext>
+    </p:extLst>
+  </p:cSld>
+  <p:clrMapOvr>
+    <a:masterClrMapping/>
+  </p:clrMapOvr>
+</p:sld>
+</file>
+
+<file path=ppt/slides/slide3.xml><?xml version="1.0" encoding="utf-8"?>
+<p:sld xmlns:a="http://schemas.openxmlformats.org/drawingml/2006/main" xmlns:r="http://schemas.openxmlformats.org/officeDocument/2006/relationships" xmlns:p="http://schemas.openxmlformats.org/presentationml/2006/main">
+  <p:cSld>
+    <p:spTree>
+      <p:nvGrpSpPr>
+        <p:cNvPr id="1" name=""/>
+        <p:cNvGrpSpPr/>
+        <p:nvPr/>
+      </p:nvGrpSpPr>
+      <p:grpSpPr>
+        <a:xfrm>
+          <a:off x="0" y="0"/>
+          <a:ext cx="0" cy="0"/>
+          <a:chOff x="0" y="0"/>
+          <a:chExt cx="0" cy="0"/>
+        </a:xfrm>
+      </p:grpSpPr>
+      <p:sp>
+        <p:nvSpPr>
+          <p:cNvPr id="2" name="제목 1"/>
+          <p:cNvSpPr>
+            <a:spLocks noGrp="1"/>
+          </p:cNvSpPr>
+          <p:nvPr>
+            <p:ph type="title"/>
+          </p:nvPr>
+        </p:nvSpPr>
+        <p:spPr/>
+        <p:txBody>
+          <a:bodyPr/>
+          <a:lstStyle/>
+          <a:p>
+            <a:r>
+              <a:rPr lang="ko-KR" altLang="en-US" smtClean="0"/>
+              <a:t>팀 구성</a:t>
+            </a:r>
+            <a:endParaRPr lang="ko-KR" altLang="en-US"/>
+          </a:p>
+        </p:txBody>
+      </p:sp>
+      <p:sp>
+        <p:nvSpPr>
+          <p:cNvPr id="3" name="내용 개체 틀 2"/>
+          <p:cNvSpPr>
+            <a:spLocks noGrp="1"/>
+          </p:cNvSpPr>
+          <p:nvPr>
+            <p:ph idx="1"/>
+          </p:nvPr>
+        </p:nvSpPr>
+        <p:spPr/>
+        <p:txBody>
+          <a:bodyPr>
+            <a:normAutofit fontScale="92500" lnSpcReduction="10000"/>
+          </a:bodyPr>
+          <a:lstStyle/>
+          <a:p>
+            <a:r>
+              <a:rPr lang="ko-KR" altLang="en-US" smtClean="0"/>
+              <a:t>팀장 </a:t>
+            </a:r>
+            <a:r>
+              <a:rPr lang="en-US" altLang="ko-KR" smtClean="0"/>
+              <a:t>: </a:t>
+            </a:r>
+            <a:r>
+              <a:rPr lang="ko-KR" altLang="en-US" smtClean="0"/>
+              <a:t>각 파트별 혹은 개발팀장 등</a:t>
+            </a:r>
+            <a:endParaRPr lang="en-US" altLang="ko-KR" smtClean="0"/>
+          </a:p>
+          <a:p>
+            <a:r>
+              <a:rPr lang="ko-KR" altLang="en-US" smtClean="0"/>
+              <a:t>파트장 </a:t>
+            </a:r>
+            <a:r>
+              <a:rPr lang="en-US" altLang="ko-KR" smtClean="0"/>
+              <a:t>: </a:t>
+            </a:r>
+            <a:r>
+              <a:rPr lang="ko-KR" altLang="en-US" smtClean="0"/>
+              <a:t>소통을 원활하게 하기 위해</a:t>
+            </a:r>
+            <a:r>
+              <a:rPr lang="en-US" altLang="ko-KR" smtClean="0"/>
+              <a:t>. </a:t>
+            </a:r>
+            <a:r>
+              <a:rPr lang="ko-KR" altLang="en-US" smtClean="0"/>
+              <a:t>팀 구성이 </a:t>
+            </a:r>
+            <a:r>
+              <a:rPr lang="en-US" altLang="ko-KR" smtClean="0"/>
+              <a:t>2</a:t>
+            </a:r>
+            <a:r>
+              <a:rPr lang="ko-KR" altLang="en-US" smtClean="0"/>
+              <a:t>인 이상일 때</a:t>
+            </a:r>
+            <a:r>
+              <a:rPr lang="en-US" altLang="ko-KR" smtClean="0"/>
+              <a:t>.</a:t>
+            </a:r>
+          </a:p>
+          <a:p>
+            <a:endParaRPr lang="en-US" altLang="ko-KR"/>
+          </a:p>
+          <a:p>
+            <a:r>
+              <a:rPr lang="ko-KR" altLang="en-US" smtClean="0"/>
+              <a:t>게임 디자인 직군은 모든 파트가 톱니바퀴처럼 긴밀하게 연결되어 있어서 각각의 파트를 직업군으로 나누는 게 아닌</a:t>
+            </a:r>
+            <a:r>
+              <a:rPr lang="en-US" altLang="ko-KR" smtClean="0"/>
+              <a:t>, ‘</a:t>
+            </a:r>
+            <a:r>
+              <a:rPr lang="ko-KR" altLang="en-US" smtClean="0"/>
+              <a:t>담당</a:t>
+            </a:r>
+            <a:r>
+              <a:rPr lang="en-US" altLang="ko-KR" smtClean="0"/>
+              <a:t>’</a:t>
+            </a:r>
+            <a:r>
+              <a:rPr lang="ko-KR" altLang="en-US" smtClean="0"/>
+              <a:t>이라고 하는 것</a:t>
+            </a:r>
+            <a:endParaRPr lang="en-US" altLang="ko-KR" smtClean="0"/>
+          </a:p>
+          <a:p>
+            <a:endParaRPr lang="en-US" altLang="ko-KR"/>
+          </a:p>
+          <a:p>
+            <a:r>
+              <a:rPr lang="ko-KR" altLang="en-US" smtClean="0"/>
+              <a:t>프로그램 영역에서의 최고 수장 </a:t>
+            </a:r>
+            <a:r>
+              <a:rPr lang="en-US" altLang="ko-KR" smtClean="0"/>
+              <a:t>: TD(</a:t>
+            </a:r>
+            <a:r>
+              <a:rPr lang="ko-KR" altLang="en-US" smtClean="0"/>
+              <a:t>테크니컬 디렉터</a:t>
+            </a:r>
+            <a:r>
+              <a:rPr lang="en-US" altLang="ko-KR" smtClean="0"/>
+              <a:t>) – </a:t>
+            </a:r>
+            <a:r>
+              <a:rPr lang="ko-KR" altLang="en-US" smtClean="0"/>
+              <a:t>기술적인 방향성을 잡아주는 사람</a:t>
+            </a:r>
+            <a:r>
+              <a:rPr lang="en-US" altLang="ko-KR" smtClean="0"/>
+              <a:t>. </a:t>
+            </a:r>
+            <a:r>
+              <a:rPr lang="ko-KR" altLang="en-US" smtClean="0"/>
+              <a:t>이 사람이 구현 못한다고 하면 그 팀은 그 기술을 구현 못함</a:t>
+            </a:r>
+            <a:r>
+              <a:rPr lang="en-US" altLang="ko-KR" smtClean="0"/>
+              <a:t>. </a:t>
+            </a:r>
+            <a:r>
+              <a:rPr lang="ko-KR" altLang="en-US" smtClean="0"/>
+              <a:t>대부분은 엔진 프로그래머가 </a:t>
+            </a:r>
+            <a:r>
+              <a:rPr lang="en-US" altLang="ko-KR" smtClean="0"/>
+              <a:t>TD</a:t>
+            </a:r>
+            <a:r>
+              <a:rPr lang="ko-KR" altLang="en-US" smtClean="0"/>
+              <a:t>가 될 가능성이 높음</a:t>
+            </a:r>
+            <a:endParaRPr lang="ko-KR" altLang="en-US"/>
+          </a:p>
+        </p:txBody>
+      </p:sp>
+    </p:spTree>
+    <p:extLst>
+      <p:ext uri="{BB962C8B-B14F-4D97-AF65-F5344CB8AC3E}">
+        <p14:creationId xmlns:p14="http://schemas.microsoft.com/office/powerpoint/2010/main" val="3054873200"/>
+      </p:ext>
+    </p:extLst>
+  </p:cSld>
+  <p:clrMapOvr>
+    <a:masterClrMapping/>
+  </p:clrMapOvr>
+</p:sld>
+</file>
+
+<file path=ppt/slides/slide4.xml><?xml version="1.0" encoding="utf-8"?>
+<p:sld xmlns:a="http://schemas.openxmlformats.org/drawingml/2006/main" xmlns:r="http://schemas.openxmlformats.org/officeDocument/2006/relationships" xmlns:p="http://schemas.openxmlformats.org/presentationml/2006/main">
+  <p:cSld>
+    <p:spTree>
+      <p:nvGrpSpPr>
+        <p:cNvPr id="1" name=""/>
+        <p:cNvGrpSpPr/>
+        <p:nvPr/>
+      </p:nvGrpSpPr>
+      <p:grpSpPr>
+        <a:xfrm>
+          <a:off x="0" y="0"/>
+          <a:ext cx="0" cy="0"/>
+          <a:chOff x="0" y="0"/>
+          <a:chExt cx="0" cy="0"/>
+        </a:xfrm>
+      </p:grpSpPr>
+      <p:sp>
+        <p:nvSpPr>
+          <p:cNvPr id="2" name="제목 1"/>
+          <p:cNvSpPr>
+            <a:spLocks noGrp="1"/>
+          </p:cNvSpPr>
+          <p:nvPr>
+            <p:ph type="title"/>
+          </p:nvPr>
+        </p:nvSpPr>
+        <p:spPr/>
+        <p:txBody>
+          <a:bodyPr/>
+          <a:lstStyle/>
+          <a:p>
+            <a:r>
+              <a:rPr lang="ko-KR" altLang="en-US" smtClean="0"/>
+              <a:t>팀 구성</a:t>
+            </a:r>
+            <a:endParaRPr lang="ko-KR" altLang="en-US"/>
+          </a:p>
+        </p:txBody>
+      </p:sp>
+      <p:sp>
+        <p:nvSpPr>
+          <p:cNvPr id="3" name="내용 개체 틀 2"/>
+          <p:cNvSpPr>
+            <a:spLocks noGrp="1"/>
+          </p:cNvSpPr>
+          <p:nvPr>
+            <p:ph idx="1"/>
+          </p:nvPr>
+        </p:nvSpPr>
+        <p:spPr/>
+        <p:txBody>
+          <a:bodyPr>
+            <a:normAutofit fontScale="85000" lnSpcReduction="20000"/>
+          </a:bodyPr>
+          <a:lstStyle/>
+          <a:p>
+            <a:r>
+              <a:rPr lang="ko-KR" altLang="en-US" smtClean="0"/>
+              <a:t>그래픽 직업군에서 최고 수장 </a:t>
+            </a:r>
+            <a:r>
+              <a:rPr lang="en-US" altLang="ko-KR" smtClean="0"/>
+              <a:t>: AD(</a:t>
+            </a:r>
+            <a:r>
+              <a:rPr lang="ko-KR" altLang="en-US" smtClean="0"/>
+              <a:t>아트 디렉터</a:t>
+            </a:r>
+            <a:r>
+              <a:rPr lang="en-US" altLang="ko-KR" smtClean="0"/>
+              <a:t>). </a:t>
+            </a:r>
+            <a:r>
+              <a:rPr lang="ko-KR" altLang="en-US" smtClean="0"/>
+              <a:t>그 스타일 우리와 맞지 않는다고 하면 안 하는 것</a:t>
+            </a:r>
+            <a:r>
+              <a:rPr lang="en-US" altLang="ko-KR" smtClean="0"/>
+              <a:t>. </a:t>
+            </a:r>
+            <a:r>
+              <a:rPr lang="ko-KR" altLang="en-US" smtClean="0"/>
+              <a:t>그래야 팀이 돌아간다</a:t>
+            </a:r>
+            <a:r>
+              <a:rPr lang="en-US" altLang="ko-KR" smtClean="0"/>
+              <a:t>.</a:t>
+            </a:r>
+          </a:p>
+          <a:p>
+            <a:endParaRPr lang="en-US" altLang="ko-KR"/>
+          </a:p>
+          <a:p>
+            <a:r>
+              <a:rPr lang="ko-KR" altLang="en-US" smtClean="0"/>
+              <a:t>게임 디자이너 직군에서 리더는 </a:t>
+            </a:r>
+            <a:r>
+              <a:rPr lang="en-US" altLang="ko-KR" smtClean="0"/>
+              <a:t>(</a:t>
+            </a:r>
+            <a:r>
+              <a:rPr lang="ko-KR" altLang="en-US" smtClean="0"/>
+              <a:t>생소하지만</a:t>
+            </a:r>
+            <a:r>
+              <a:rPr lang="en-US" altLang="ko-KR" smtClean="0"/>
+              <a:t>) CD(</a:t>
+            </a:r>
+            <a:r>
+              <a:rPr lang="ko-KR" altLang="en-US" smtClean="0"/>
+              <a:t>크리에이티브 디렉터</a:t>
+            </a:r>
+            <a:r>
+              <a:rPr lang="en-US" altLang="ko-KR" smtClean="0"/>
+              <a:t>)</a:t>
+            </a:r>
+            <a:r>
+              <a:rPr lang="ko-KR" altLang="en-US" smtClean="0"/>
+              <a:t>라고 한다</a:t>
+            </a:r>
+            <a:r>
+              <a:rPr lang="en-US" altLang="ko-KR" smtClean="0"/>
+              <a:t>. </a:t>
+            </a:r>
+            <a:r>
+              <a:rPr lang="ko-KR" altLang="en-US" smtClean="0"/>
+              <a:t>국내에는 </a:t>
+            </a:r>
+            <a:r>
+              <a:rPr lang="en-US" altLang="ko-KR" smtClean="0"/>
+              <a:t>CD</a:t>
+            </a:r>
+            <a:r>
+              <a:rPr lang="ko-KR" altLang="en-US" smtClean="0"/>
+              <a:t>가 다 실패해서 별로 중요하지 않은 포지션임</a:t>
+            </a:r>
+            <a:r>
+              <a:rPr lang="en-US" altLang="ko-KR" smtClean="0"/>
+              <a:t>…</a:t>
+            </a:r>
+            <a:r>
+              <a:rPr lang="ko-KR" altLang="en-US" smtClean="0"/>
+              <a:t>ㅎㅠ</a:t>
+            </a:r>
+            <a:r>
+              <a:rPr lang="en-US" altLang="ko-KR" smtClean="0"/>
+              <a:t>. PD(</a:t>
+            </a:r>
+            <a:r>
+              <a:rPr lang="ko-KR" altLang="en-US" smtClean="0"/>
+              <a:t>프로덕트</a:t>
+            </a:r>
+            <a:r>
+              <a:rPr lang="en-US" altLang="ko-KR" smtClean="0"/>
+              <a:t>/</a:t>
+            </a:r>
+            <a:r>
+              <a:rPr lang="ko-KR" altLang="en-US" smtClean="0"/>
+              <a:t>프로젝트 디렉터</a:t>
+            </a:r>
+            <a:r>
+              <a:rPr lang="en-US" altLang="ko-KR" smtClean="0"/>
+              <a:t>)</a:t>
+            </a:r>
+            <a:r>
+              <a:rPr lang="ko-KR" altLang="en-US" smtClean="0"/>
+              <a:t>가 수장 역할을 한다</a:t>
+            </a:r>
+            <a:r>
+              <a:rPr lang="en-US" altLang="ko-KR" smtClean="0"/>
+              <a:t>. </a:t>
+            </a:r>
+            <a:r>
+              <a:rPr lang="ko-KR" altLang="en-US" smtClean="0"/>
+              <a:t>이 </a:t>
+            </a:r>
+            <a:r>
+              <a:rPr lang="en-US" altLang="ko-KR" smtClean="0"/>
+              <a:t>PD</a:t>
+            </a:r>
+            <a:r>
+              <a:rPr lang="ko-KR" altLang="en-US" smtClean="0"/>
+              <a:t>는 </a:t>
+            </a:r>
+            <a:r>
+              <a:rPr lang="en-US" altLang="ko-KR" smtClean="0"/>
+              <a:t>TD</a:t>
+            </a:r>
+            <a:r>
+              <a:rPr lang="ko-KR" altLang="en-US" smtClean="0"/>
+              <a:t>나 </a:t>
+            </a:r>
+            <a:r>
+              <a:rPr lang="en-US" altLang="ko-KR" smtClean="0"/>
+              <a:t>AD</a:t>
+            </a:r>
+            <a:r>
+              <a:rPr lang="ko-KR" altLang="en-US" smtClean="0"/>
+              <a:t>가 할 수도 있다</a:t>
+            </a:r>
+            <a:r>
+              <a:rPr lang="en-US" altLang="ko-KR" smtClean="0"/>
+              <a:t>. </a:t>
+            </a:r>
+            <a:r>
+              <a:rPr lang="ko-KR" altLang="en-US" smtClean="0"/>
+              <a:t>총괄 책임자같은 느낌이다</a:t>
+            </a:r>
+            <a:r>
+              <a:rPr lang="en-US" altLang="ko-KR" smtClean="0"/>
+              <a:t>.</a:t>
+            </a:r>
+          </a:p>
+          <a:p>
+            <a:endParaRPr lang="en-US" altLang="ko-KR"/>
+          </a:p>
+          <a:p>
+            <a:r>
+              <a:rPr lang="en-US" altLang="ko-KR" smtClean="0"/>
+              <a:t>PD</a:t>
+            </a:r>
+            <a:r>
+              <a:rPr lang="ko-KR" altLang="en-US" smtClean="0"/>
+              <a:t>는 재미</a:t>
+            </a:r>
+            <a:r>
+              <a:rPr lang="en-US" altLang="ko-KR" smtClean="0"/>
+              <a:t>, </a:t>
+            </a:r>
+            <a:r>
+              <a:rPr lang="ko-KR" altLang="en-US" smtClean="0"/>
+              <a:t>수익과 같은 성공을 위한 방향과 일정을 정하는 사람</a:t>
+            </a:r>
+            <a:r>
+              <a:rPr lang="en-US" altLang="ko-KR" smtClean="0"/>
+              <a:t>. </a:t>
+            </a:r>
+            <a:r>
+              <a:rPr lang="ko-KR" altLang="en-US" smtClean="0"/>
+              <a:t>프로그램에 대한 최종 결정권을 가진 사람</a:t>
+            </a:r>
+            <a:r>
+              <a:rPr lang="en-US" altLang="ko-KR" smtClean="0"/>
+              <a:t>. </a:t>
+            </a:r>
+            <a:r>
+              <a:rPr lang="ko-KR" altLang="en-US" smtClean="0"/>
+              <a:t>게임 제작의 전체 감독</a:t>
+            </a:r>
+            <a:r>
+              <a:rPr lang="en-US" altLang="ko-KR" smtClean="0"/>
+              <a:t>/</a:t>
+            </a:r>
+            <a:r>
+              <a:rPr lang="ko-KR" altLang="en-US" smtClean="0"/>
+              <a:t>책임자</a:t>
+            </a:r>
+            <a:endParaRPr lang="en-US" altLang="ko-KR" smtClean="0"/>
+          </a:p>
+          <a:p>
+            <a:endParaRPr lang="en-US" altLang="ko-KR"/>
+          </a:p>
+          <a:p>
+            <a:r>
+              <a:rPr lang="ko-KR" altLang="en-US" smtClean="0"/>
+              <a:t>그러나 각 영역 안에서 </a:t>
+            </a:r>
+            <a:r>
+              <a:rPr lang="en-US" altLang="ko-KR" smtClean="0"/>
+              <a:t>AD(</a:t>
+            </a:r>
+            <a:r>
+              <a:rPr lang="ko-KR" altLang="en-US" smtClean="0"/>
+              <a:t>그래픽 스타일</a:t>
+            </a:r>
+            <a:r>
+              <a:rPr lang="en-US" altLang="ko-KR" smtClean="0"/>
+              <a:t>), TD(</a:t>
+            </a:r>
+            <a:r>
+              <a:rPr lang="ko-KR" altLang="en-US" smtClean="0"/>
+              <a:t>구현</a:t>
+            </a:r>
+            <a:r>
+              <a:rPr lang="en-US" altLang="ko-KR" smtClean="0"/>
+              <a:t>), PD(</a:t>
+            </a:r>
+            <a:r>
+              <a:rPr lang="ko-KR" altLang="en-US" smtClean="0"/>
+              <a:t>재미</a:t>
+            </a:r>
+            <a:r>
+              <a:rPr lang="en-US" altLang="ko-KR" smtClean="0"/>
+              <a:t>, </a:t>
+            </a:r>
+            <a:r>
+              <a:rPr lang="ko-KR" altLang="en-US" smtClean="0"/>
+              <a:t>수익</a:t>
+            </a:r>
+            <a:r>
+              <a:rPr lang="en-US" altLang="ko-KR" smtClean="0"/>
+              <a:t>)</a:t>
+            </a:r>
+            <a:r>
+              <a:rPr lang="ko-KR" altLang="en-US" smtClean="0"/>
+              <a:t>에 대한 책임은 이들이 진다</a:t>
+            </a:r>
+            <a:r>
+              <a:rPr lang="en-US" altLang="ko-KR" smtClean="0"/>
+              <a:t>.</a:t>
+            </a:r>
+            <a:endParaRPr lang="ko-KR" altLang="en-US"/>
+          </a:p>
+        </p:txBody>
+      </p:sp>
+    </p:spTree>
+    <p:extLst>
+      <p:ext uri="{BB962C8B-B14F-4D97-AF65-F5344CB8AC3E}">
+        <p14:creationId xmlns:p14="http://schemas.microsoft.com/office/powerpoint/2010/main" val="1907225873"/>
+      </p:ext>
+    </p:extLst>
+  </p:cSld>
+  <p:clrMapOvr>
+    <a:masterClrMapping/>
+  </p:clrMapOvr>
+</p:sld>
+</file>
+
+<file path=ppt/slides/slide5.xml><?xml version="1.0" encoding="utf-8"?>
+<p:sld xmlns:a="http://schemas.openxmlformats.org/drawingml/2006/main" xmlns:r="http://schemas.openxmlformats.org/officeDocument/2006/relationships" xmlns:p="http://schemas.openxmlformats.org/presentationml/2006/main">
+  <p:cSld>
+    <p:spTree>
+      <p:nvGrpSpPr>
+        <p:cNvPr id="1" name=""/>
+        <p:cNvGrpSpPr/>
+        <p:nvPr/>
+      </p:nvGrpSpPr>
+      <p:grpSpPr>
+        <a:xfrm>
+          <a:off x="0" y="0"/>
+          <a:ext cx="0" cy="0"/>
+          <a:chOff x="0" y="0"/>
+          <a:chExt cx="0" cy="0"/>
+        </a:xfrm>
+      </p:grpSpPr>
+      <p:sp>
+        <p:nvSpPr>
+          <p:cNvPr id="2" name="제목 1"/>
+          <p:cNvSpPr>
+            <a:spLocks noGrp="1"/>
+          </p:cNvSpPr>
+          <p:nvPr>
+            <p:ph type="title"/>
+          </p:nvPr>
+        </p:nvSpPr>
+        <p:spPr/>
+        <p:txBody>
+          <a:bodyPr/>
+          <a:lstStyle/>
+          <a:p>
+            <a:r>
+              <a:rPr lang="ko-KR" altLang="en-US" smtClean="0"/>
+              <a:t>유관 부서</a:t>
+            </a:r>
+            <a:endParaRPr lang="ko-KR" altLang="en-US"/>
+          </a:p>
+        </p:txBody>
+      </p:sp>
+      <p:sp>
+        <p:nvSpPr>
+          <p:cNvPr id="3" name="내용 개체 틀 2"/>
+          <p:cNvSpPr>
+            <a:spLocks noGrp="1"/>
+          </p:cNvSpPr>
+          <p:nvPr>
+            <p:ph idx="1"/>
+          </p:nvPr>
+        </p:nvSpPr>
+        <p:spPr/>
+        <p:txBody>
+          <a:bodyPr>
+            <a:normAutofit/>
+          </a:bodyPr>
+          <a:lstStyle/>
+          <a:p>
+            <a:r>
+              <a:rPr lang="ko-KR" altLang="en-US" smtClean="0"/>
+              <a:t>게임을 개발할 때 개발만 있는 것이 아님</a:t>
+            </a:r>
+            <a:r>
+              <a:rPr lang="en-US" altLang="ko-KR" smtClean="0"/>
+              <a:t>. </a:t>
+            </a:r>
+            <a:r>
+              <a:rPr lang="ko-KR" altLang="en-US" smtClean="0"/>
+              <a:t>게임 개발과 직접적으로 연관있는 부서들이 있다</a:t>
+            </a:r>
+            <a:r>
+              <a:rPr lang="en-US" altLang="ko-KR" smtClean="0"/>
+              <a:t>.</a:t>
+            </a:r>
+          </a:p>
+          <a:p>
+            <a:endParaRPr lang="en-US" altLang="ko-KR" smtClean="0"/>
+          </a:p>
+          <a:p>
+            <a:r>
+              <a:rPr lang="en-US" altLang="ko-KR" smtClean="0"/>
+              <a:t>QA : </a:t>
+            </a:r>
+            <a:r>
+              <a:rPr lang="ko-KR" altLang="en-US" smtClean="0"/>
+              <a:t>퀄리티 어슈어런스</a:t>
+            </a:r>
+            <a:r>
+              <a:rPr lang="en-US" altLang="ko-KR" smtClean="0"/>
+              <a:t>(</a:t>
+            </a:r>
+            <a:r>
+              <a:rPr lang="ko-KR" altLang="en-US" smtClean="0"/>
+              <a:t>품질 보증</a:t>
+            </a:r>
+            <a:r>
+              <a:rPr lang="en-US" altLang="ko-KR" smtClean="0"/>
+              <a:t>). </a:t>
+            </a:r>
+            <a:r>
+              <a:rPr lang="ko-KR" altLang="en-US" smtClean="0"/>
+              <a:t>모든 영역의 작업물들에 대한 테스트를 해준다</a:t>
+            </a:r>
+            <a:r>
+              <a:rPr lang="en-US" altLang="ko-KR" smtClean="0"/>
+              <a:t>.</a:t>
+            </a:r>
+          </a:p>
+          <a:p>
+            <a:r>
+              <a:rPr lang="en-US" altLang="ko-KR" smtClean="0"/>
+              <a:t>Fun_QA : </a:t>
+            </a:r>
+            <a:r>
+              <a:rPr lang="ko-KR" altLang="en-US" smtClean="0"/>
+              <a:t>재미를 보증해주는 사람들</a:t>
+            </a:r>
+            <a:r>
+              <a:rPr lang="en-US" altLang="ko-KR" smtClean="0"/>
+              <a:t>. </a:t>
+            </a:r>
+            <a:r>
+              <a:rPr lang="ko-KR" altLang="en-US" smtClean="0"/>
+              <a:t>게임이 재미없으면 기획과 이 사람들 때문이다 ㅎㅎ</a:t>
+            </a:r>
+            <a:endParaRPr lang="en-US" altLang="ko-KR" smtClean="0"/>
+          </a:p>
+          <a:p>
+            <a:r>
+              <a:rPr lang="ko-KR" altLang="en-US" smtClean="0"/>
+              <a:t>구현상 오류가 많으면 프로그래머가</a:t>
+            </a:r>
+            <a:r>
+              <a:rPr lang="en-US" altLang="ko-KR" smtClean="0"/>
+              <a:t>, </a:t>
+            </a:r>
+            <a:r>
+              <a:rPr lang="ko-KR" altLang="en-US" smtClean="0"/>
+              <a:t>스타일 상 혹은 디자인에 오류가 있으면 그래픽 디자이너가 책임지는 것</a:t>
+            </a:r>
+            <a:endParaRPr lang="ko-KR" altLang="en-US"/>
+          </a:p>
+        </p:txBody>
+      </p:sp>
+    </p:spTree>
+    <p:extLst>
+      <p:ext uri="{BB962C8B-B14F-4D97-AF65-F5344CB8AC3E}">
+        <p14:creationId xmlns:p14="http://schemas.microsoft.com/office/powerpoint/2010/main" val="3145318416"/>
+      </p:ext>
+    </p:extLst>
+  </p:cSld>
+  <p:clrMapOvr>
+    <a:masterClrMapping/>
+  </p:clrMapOvr>
+</p:sld>
+</file>
+
+<file path=ppt/slides/slide6.xml><?xml version="1.0" encoding="utf-8"?>
+<p:sld xmlns:a="http://schemas.openxmlformats.org/drawingml/2006/main" xmlns:r="http://schemas.openxmlformats.org/officeDocument/2006/relationships" xmlns:p="http://schemas.openxmlformats.org/presentationml/2006/main">
+  <p:cSld>
+    <p:spTree>
+      <p:nvGrpSpPr>
+        <p:cNvPr id="1" name=""/>
+        <p:cNvGrpSpPr/>
+        <p:nvPr/>
+      </p:nvGrpSpPr>
+      <p:grpSpPr>
+        <a:xfrm>
+          <a:off x="0" y="0"/>
+          <a:ext cx="0" cy="0"/>
+          <a:chOff x="0" y="0"/>
+          <a:chExt cx="0" cy="0"/>
+        </a:xfrm>
+      </p:grpSpPr>
+      <p:sp>
+        <p:nvSpPr>
+          <p:cNvPr id="2" name="제목 1"/>
+          <p:cNvSpPr>
+            <a:spLocks noGrp="1"/>
+          </p:cNvSpPr>
+          <p:nvPr>
+            <p:ph type="title"/>
+          </p:nvPr>
+        </p:nvSpPr>
+        <p:spPr/>
+        <p:txBody>
+          <a:bodyPr/>
+          <a:lstStyle/>
+          <a:p>
+            <a:r>
+              <a:rPr lang="ko-KR" altLang="en-US" smtClean="0"/>
+              <a:t>유관 부서</a:t>
+            </a:r>
+            <a:endParaRPr lang="ko-KR" altLang="en-US"/>
+          </a:p>
+        </p:txBody>
+      </p:sp>
+      <p:sp>
+        <p:nvSpPr>
+          <p:cNvPr id="3" name="내용 개체 틀 2"/>
+          <p:cNvSpPr>
+            <a:spLocks noGrp="1"/>
+          </p:cNvSpPr>
+          <p:nvPr>
+            <p:ph idx="1"/>
+          </p:nvPr>
+        </p:nvSpPr>
+        <p:spPr/>
+        <p:txBody>
+          <a:bodyPr>
+            <a:normAutofit/>
+          </a:bodyPr>
+          <a:lstStyle/>
+          <a:p>
+            <a:r>
+              <a:rPr lang="en-US" altLang="ko-KR" smtClean="0"/>
+              <a:t>PM – </a:t>
+            </a:r>
+            <a:r>
+              <a:rPr lang="ko-KR" altLang="en-US" smtClean="0"/>
+              <a:t>프로젝트 매니저</a:t>
+            </a:r>
+            <a:r>
+              <a:rPr lang="en-US" altLang="ko-KR" smtClean="0"/>
+              <a:t>(</a:t>
+            </a:r>
+            <a:r>
+              <a:rPr lang="ko-KR" altLang="en-US" smtClean="0"/>
+              <a:t>일정 관리</a:t>
+            </a:r>
+            <a:r>
+              <a:rPr lang="en-US" altLang="ko-KR" smtClean="0"/>
+              <a:t>, </a:t>
+            </a:r>
+            <a:r>
+              <a:rPr lang="ko-KR" altLang="en-US" smtClean="0"/>
+              <a:t>소통 관리를</a:t>
+            </a:r>
+            <a:r>
+              <a:rPr lang="en-US" altLang="ko-KR"/>
+              <a:t> </a:t>
+            </a:r>
+            <a:r>
+              <a:rPr lang="ko-KR" altLang="en-US" smtClean="0"/>
+              <a:t>지원</a:t>
+            </a:r>
+            <a:r>
+              <a:rPr lang="en-US" altLang="ko-KR" smtClean="0"/>
+              <a:t>) : </a:t>
+            </a:r>
+            <a:r>
+              <a:rPr lang="ko-KR" altLang="en-US" smtClean="0"/>
+              <a:t>각각의 직업군들이 일정</a:t>
+            </a:r>
+            <a:r>
+              <a:rPr lang="en-US" altLang="ko-KR" smtClean="0"/>
+              <a:t>, </a:t>
+            </a:r>
+            <a:r>
+              <a:rPr lang="ko-KR" altLang="en-US" smtClean="0"/>
+              <a:t>작업물 믹스매치 등에 대한 소통에 대해 관리하는 사람들</a:t>
+            </a:r>
+            <a:endParaRPr lang="en-US" altLang="ko-KR" smtClean="0"/>
+          </a:p>
+          <a:p>
+            <a:r>
+              <a:rPr lang="en-US" altLang="ko-KR" smtClean="0"/>
+              <a:t>CM – PM </a:t>
+            </a:r>
+            <a:r>
+              <a:rPr lang="ko-KR" altLang="en-US" smtClean="0"/>
+              <a:t>밑의 직업군</a:t>
+            </a:r>
+            <a:r>
+              <a:rPr lang="en-US" altLang="ko-KR" smtClean="0"/>
+              <a:t>. </a:t>
+            </a:r>
+            <a:r>
+              <a:rPr lang="ko-KR" altLang="en-US" smtClean="0"/>
+              <a:t>커뮤니케이션 매니저</a:t>
+            </a:r>
+            <a:endParaRPr lang="ko-KR" altLang="en-US"/>
+          </a:p>
+        </p:txBody>
+      </p:sp>
+    </p:spTree>
+    <p:extLst>
+      <p:ext uri="{BB962C8B-B14F-4D97-AF65-F5344CB8AC3E}">
+        <p14:creationId xmlns:p14="http://schemas.microsoft.com/office/powerpoint/2010/main" val="3038847002"/>
+      </p:ext>
+    </p:extLst>
+  </p:cSld>
+  <p:clrMapOvr>
+    <a:masterClrMapping/>
+  </p:clrMapOvr>
+</p:sld>
+</file>
+
+<file path=ppt/slides/slide7.xml><?xml version="1.0" encoding="utf-8"?>
+<p:sld xmlns:a="http://schemas.openxmlformats.org/drawingml/2006/main" xmlns:r="http://schemas.openxmlformats.org/officeDocument/2006/relationships" xmlns:p="http://schemas.openxmlformats.org/presentationml/2006/main">
+  <p:cSld>
+    <p:spTree>
+      <p:nvGrpSpPr>
+        <p:cNvPr id="1" name=""/>
+        <p:cNvGrpSpPr/>
+        <p:nvPr/>
+      </p:nvGrpSpPr>
+      <p:grpSpPr>
+        <a:xfrm>
+          <a:off x="0" y="0"/>
+          <a:ext cx="0" cy="0"/>
+          <a:chOff x="0" y="0"/>
+          <a:chExt cx="0" cy="0"/>
+        </a:xfrm>
+      </p:grpSpPr>
+      <p:sp>
+        <p:nvSpPr>
+          <p:cNvPr id="2" name="제목 1"/>
+          <p:cNvSpPr>
+            <a:spLocks noGrp="1"/>
+          </p:cNvSpPr>
+          <p:nvPr>
+            <p:ph type="title"/>
+          </p:nvPr>
+        </p:nvSpPr>
+        <p:spPr/>
+        <p:txBody>
+          <a:bodyPr/>
+          <a:lstStyle/>
+          <a:p>
+            <a:r>
+              <a:rPr lang="ko-KR" altLang="en-US" smtClean="0"/>
+              <a:t>개발쪽과 관련됐지만 필수는 아닌 직업군</a:t>
+            </a:r>
+            <a:endParaRPr lang="ko-KR" altLang="en-US"/>
+          </a:p>
+        </p:txBody>
+      </p:sp>
+      <p:sp>
+        <p:nvSpPr>
+          <p:cNvPr id="3" name="내용 개체 틀 2"/>
+          <p:cNvSpPr>
+            <a:spLocks noGrp="1"/>
+          </p:cNvSpPr>
+          <p:nvPr>
+            <p:ph idx="1"/>
+          </p:nvPr>
+        </p:nvSpPr>
+        <p:spPr/>
+        <p:txBody>
+          <a:bodyPr>
+            <a:normAutofit/>
+          </a:bodyPr>
+          <a:lstStyle/>
+          <a:p>
+            <a:r>
+              <a:rPr lang="ko-KR" altLang="en-US" smtClean="0"/>
+              <a:t>시네마틱 디자이너 </a:t>
+            </a:r>
+            <a:r>
+              <a:rPr lang="en-US" altLang="ko-KR" smtClean="0"/>
+              <a:t>: </a:t>
+            </a:r>
+            <a:r>
+              <a:rPr lang="ko-KR" altLang="en-US" smtClean="0"/>
+              <a:t>영화를 보는 것처럼 컷 씬 작업</a:t>
+            </a:r>
+            <a:endParaRPr lang="en-US" altLang="ko-KR" smtClean="0"/>
+          </a:p>
+          <a:p>
+            <a:r>
+              <a:rPr lang="ko-KR" altLang="en-US" smtClean="0"/>
+              <a:t>네러티브 디자이너 </a:t>
+            </a:r>
+            <a:r>
+              <a:rPr lang="en-US" altLang="ko-KR" smtClean="0"/>
+              <a:t>: </a:t>
+            </a:r>
+            <a:r>
+              <a:rPr lang="ko-KR" altLang="en-US" smtClean="0"/>
+              <a:t>게임의 상황이나 분위기에 맞게 </a:t>
+            </a:r>
+            <a:r>
+              <a:rPr lang="en-US" altLang="ko-KR" smtClean="0"/>
+              <a:t>NPC</a:t>
+            </a:r>
+            <a:r>
+              <a:rPr lang="ko-KR" altLang="en-US" smtClean="0"/>
+              <a:t>의 대사를 맞추는 것이 그 예시</a:t>
+            </a:r>
+            <a:r>
+              <a:rPr lang="en-US" altLang="ko-KR" smtClean="0"/>
+              <a:t>.</a:t>
+            </a:r>
+          </a:p>
+          <a:p>
+            <a:r>
+              <a:rPr lang="ko-KR" altLang="en-US" smtClean="0"/>
+              <a:t>이 두 직업군이 영화를 보는 듯한 느낌을 준다</a:t>
+            </a:r>
+            <a:r>
+              <a:rPr lang="en-US" altLang="ko-KR" smtClean="0"/>
+              <a:t>.</a:t>
+            </a:r>
+          </a:p>
+          <a:p>
+            <a:r>
+              <a:rPr lang="ko-KR" altLang="en-US" smtClean="0"/>
+              <a:t>국내에서는 이 영역을 아직까지 퀘스트 담당이 한다</a:t>
+            </a:r>
+            <a:r>
+              <a:rPr lang="en-US" altLang="ko-KR" smtClean="0"/>
+              <a:t>.</a:t>
+            </a:r>
+          </a:p>
+          <a:p>
+            <a:endParaRPr lang="en-US" altLang="ko-KR"/>
+          </a:p>
+        </p:txBody>
+      </p:sp>
+    </p:spTree>
+    <p:extLst>
+      <p:ext uri="{BB962C8B-B14F-4D97-AF65-F5344CB8AC3E}">
+        <p14:creationId xmlns:p14="http://schemas.microsoft.com/office/powerpoint/2010/main" val="1507941059"/>
+      </p:ext>
+    </p:extLst>
+  </p:cSld>
+  <p:clrMapOvr>
+    <a:masterClrMapping/>
+  </p:clrMapOvr>
+</p:sld>
+</file>
+
+<file path=ppt/slides/slide8.xml><?xml version="1.0" encoding="utf-8"?>
+<p:sld xmlns:a="http://schemas.openxmlformats.org/drawingml/2006/main" xmlns:r="http://schemas.openxmlformats.org/officeDocument/2006/relationships" xmlns:p="http://schemas.openxmlformats.org/presentationml/2006/main">
+  <p:cSld>
+    <p:spTree>
+      <p:nvGrpSpPr>
+        <p:cNvPr id="1" name=""/>
+        <p:cNvGrpSpPr/>
+        <p:nvPr/>
+      </p:nvGrpSpPr>
+      <p:grpSpPr>
+        <a:xfrm>
+          <a:off x="0" y="0"/>
+          <a:ext cx="0" cy="0"/>
+          <a:chOff x="0" y="0"/>
+          <a:chExt cx="0" cy="0"/>
+        </a:xfrm>
+      </p:grpSpPr>
+      <p:sp>
+        <p:nvSpPr>
+          <p:cNvPr id="2" name="제목 1"/>
+          <p:cNvSpPr>
+            <a:spLocks noGrp="1"/>
+          </p:cNvSpPr>
+          <p:nvPr>
+            <p:ph type="title"/>
+          </p:nvPr>
+        </p:nvSpPr>
+        <p:spPr/>
+        <p:txBody>
+          <a:bodyPr/>
+          <a:lstStyle/>
+          <a:p>
+            <a:r>
+              <a:rPr lang="ko-KR" altLang="en-US"/>
+              <a:t>개발쪽과 관련됐지만 필수는 아닌 직업군</a:t>
+            </a:r>
+          </a:p>
+        </p:txBody>
+      </p:sp>
+      <p:sp>
+        <p:nvSpPr>
+          <p:cNvPr id="3" name="내용 개체 틀 2"/>
+          <p:cNvSpPr>
+            <a:spLocks noGrp="1"/>
+          </p:cNvSpPr>
+          <p:nvPr>
+            <p:ph idx="1"/>
+          </p:nvPr>
+        </p:nvSpPr>
+        <p:spPr/>
+        <p:txBody>
+          <a:bodyPr/>
+          <a:lstStyle/>
+          <a:p>
+            <a:r>
+              <a:rPr lang="ko-KR" altLang="en-US"/>
+              <a:t>사운드 </a:t>
+            </a:r>
+            <a:r>
+              <a:rPr lang="en-US" altLang="ko-KR"/>
+              <a:t>: </a:t>
+            </a:r>
+            <a:r>
+              <a:rPr lang="ko-KR" altLang="en-US"/>
+              <a:t>사운드 디렉터</a:t>
+            </a:r>
+            <a:r>
+              <a:rPr lang="en-US" altLang="ko-KR"/>
+              <a:t>(SD)</a:t>
+            </a:r>
+            <a:r>
+              <a:rPr lang="ko-KR" altLang="en-US"/>
+              <a:t>가 있다</a:t>
+            </a:r>
+            <a:r>
+              <a:rPr lang="en-US" altLang="ko-KR"/>
+              <a:t>. 4</a:t>
+            </a:r>
+            <a:r>
+              <a:rPr lang="ko-KR" altLang="en-US"/>
+              <a:t>가지로 나뉨</a:t>
+            </a:r>
+            <a:endParaRPr lang="en-US" altLang="ko-KR"/>
+          </a:p>
+          <a:p>
+            <a:pPr marL="914400" lvl="1" indent="-457200">
+              <a:buFont typeface="+mj-lt"/>
+              <a:buAutoNum type="arabicPeriod"/>
+            </a:pPr>
+            <a:r>
+              <a:rPr lang="en-US" altLang="ko-KR" smtClean="0"/>
+              <a:t>BGM : </a:t>
+            </a:r>
+            <a:r>
+              <a:rPr lang="ko-KR" altLang="en-US" smtClean="0"/>
+              <a:t>배경 음악</a:t>
+            </a:r>
+            <a:endParaRPr lang="en-US" altLang="ko-KR"/>
+          </a:p>
+          <a:p>
+            <a:pPr marL="914400" lvl="1" indent="-457200">
+              <a:buFont typeface="+mj-lt"/>
+              <a:buAutoNum type="arabicPeriod"/>
+            </a:pPr>
+            <a:r>
+              <a:rPr lang="ko-KR" altLang="en-US"/>
+              <a:t>효과음</a:t>
+            </a:r>
+            <a:r>
+              <a:rPr lang="en-US" altLang="ko-KR"/>
+              <a:t>(</a:t>
+            </a:r>
+            <a:r>
+              <a:rPr lang="ko-KR" altLang="en-US"/>
+              <a:t>사운드 </a:t>
+            </a:r>
+            <a:r>
+              <a:rPr lang="ko-KR" altLang="en-US"/>
+              <a:t>이펙트</a:t>
+            </a:r>
+            <a:r>
+              <a:rPr lang="en-US" altLang="ko-KR" smtClean="0"/>
+              <a:t>) : </a:t>
+            </a:r>
+            <a:r>
+              <a:rPr lang="ko-KR" altLang="en-US" smtClean="0"/>
+              <a:t>말이 달리는 소리 등</a:t>
+            </a:r>
+            <a:endParaRPr lang="en-US" altLang="ko-KR" smtClean="0"/>
+          </a:p>
+          <a:p>
+            <a:pPr marL="914400" lvl="1" indent="-457200">
+              <a:buFont typeface="+mj-lt"/>
+              <a:buAutoNum type="arabicPeriod"/>
+            </a:pPr>
+            <a:r>
+              <a:rPr lang="ko-KR" altLang="en-US" smtClean="0"/>
+              <a:t>성우 효과음 </a:t>
+            </a:r>
+            <a:r>
+              <a:rPr lang="en-US" altLang="ko-KR" smtClean="0"/>
+              <a:t>: </a:t>
+            </a:r>
+            <a:r>
+              <a:rPr lang="ko-KR" altLang="en-US" smtClean="0"/>
+              <a:t>사람이 내는 소리</a:t>
+            </a:r>
+            <a:r>
+              <a:rPr lang="en-US" altLang="ko-KR" smtClean="0"/>
+              <a:t>.</a:t>
+            </a:r>
+          </a:p>
+          <a:p>
+            <a:pPr marL="914400" lvl="1" indent="-457200">
+              <a:buFont typeface="+mj-lt"/>
+              <a:buAutoNum type="arabicPeriod"/>
+            </a:pPr>
+            <a:r>
+              <a:rPr lang="ko-KR" altLang="en-US" smtClean="0"/>
+              <a:t>성우 대사</a:t>
+            </a:r>
+            <a:r>
+              <a:rPr lang="en-US" altLang="ko-KR" smtClean="0"/>
+              <a:t>.</a:t>
+            </a:r>
+            <a:br>
+              <a:rPr lang="en-US" altLang="ko-KR" smtClean="0"/>
+            </a:br>
+            <a:r>
+              <a:rPr lang="en-US" altLang="ko-KR" smtClean="0"/>
+              <a:t>(3, 4</a:t>
+            </a:r>
+            <a:r>
+              <a:rPr lang="ko-KR" altLang="en-US" smtClean="0"/>
+              <a:t>번은</a:t>
+            </a:r>
+            <a:r>
+              <a:rPr lang="en-US" altLang="ko-KR" smtClean="0"/>
+              <a:t>)</a:t>
+            </a:r>
+            <a:r>
+              <a:rPr lang="ko-KR" altLang="en-US" smtClean="0"/>
+              <a:t>전문 성우를 섭외해서 작업해야 하는 영역</a:t>
+            </a:r>
+            <a:endParaRPr lang="ko-KR" altLang="en-US"/>
+          </a:p>
+          <a:p>
+            <a:endParaRPr lang="ko-KR" altLang="en-US"/>
+          </a:p>
+        </p:txBody>
+      </p:sp>
+    </p:spTree>
+    <p:extLst>
+      <p:ext uri="{BB962C8B-B14F-4D97-AF65-F5344CB8AC3E}">
+        <p14:creationId xmlns:p14="http://schemas.microsoft.com/office/powerpoint/2010/main" val="686706005"/>
+      </p:ext>
+    </p:extLst>
+  </p:cSld>
+  <p:clrMapOvr>
+    <a:masterClrMapping/>
+  </p:clrMapOvr>
+</p:sld>
+</file>
+
+<file path=ppt/slides/slide9.xml><?xml version="1.0" encoding="utf-8"?>
+<p:sld xmlns:a="http://schemas.openxmlformats.org/drawingml/2006/main" xmlns:r="http://schemas.openxmlformats.org/officeDocument/2006/relationships" xmlns:p="http://schemas.openxmlformats.org/presentationml/2006/main">
+  <p:cSld>
+    <p:spTree>
+      <p:nvGrpSpPr>
+        <p:cNvPr id="1" name=""/>
+        <p:cNvGrpSpPr/>
+        <p:nvPr/>
+      </p:nvGrpSpPr>
+      <p:grpSpPr>
+        <a:xfrm>
+          <a:off x="0" y="0"/>
+          <a:ext cx="0" cy="0"/>
+          <a:chOff x="0" y="0"/>
+          <a:chExt cx="0" cy="0"/>
+        </a:xfrm>
+      </p:grpSpPr>
+      <p:sp>
+        <p:nvSpPr>
+          <p:cNvPr id="2" name="제목 1"/>
+          <p:cNvSpPr>
+            <a:spLocks noGrp="1"/>
+          </p:cNvSpPr>
+          <p:nvPr>
+            <p:ph type="title"/>
+          </p:nvPr>
+        </p:nvSpPr>
+        <p:spPr/>
+        <p:txBody>
+          <a:bodyPr/>
+          <a:lstStyle/>
+          <a:p>
+            <a:r>
+              <a:rPr lang="ko-KR" altLang="en-US"/>
+              <a:t>개발쪽과 관련됐지만 필수는 </a:t>
+            </a:r>
+            <a:r>
+              <a:rPr lang="ko-KR" altLang="en-US"/>
+              <a:t>아닌 </a:t>
+            </a:r>
+            <a:r>
+              <a:rPr lang="ko-KR" altLang="en-US" smtClean="0"/>
+              <a:t>직업군</a:t>
+            </a:r>
+            <a:r>
+              <a:rPr lang="en-US" altLang="ko-KR" smtClean="0"/>
+              <a:t/>
+            </a:r>
+            <a:br>
+              <a:rPr lang="en-US" altLang="ko-KR" smtClean="0"/>
+            </a:br>
+            <a:r>
+              <a:rPr lang="en-US" altLang="ko-KR" smtClean="0"/>
+              <a:t>- </a:t>
+            </a:r>
+            <a:r>
+              <a:rPr lang="ko-KR" altLang="en-US" smtClean="0"/>
+              <a:t>개발 인프라 관련 직군</a:t>
+            </a:r>
+            <a:endParaRPr lang="ko-KR" altLang="en-US"/>
+          </a:p>
+        </p:txBody>
+      </p:sp>
+      <p:sp>
+        <p:nvSpPr>
+          <p:cNvPr id="3" name="내용 개체 틀 2"/>
+          <p:cNvSpPr>
+            <a:spLocks noGrp="1"/>
+          </p:cNvSpPr>
+          <p:nvPr>
+            <p:ph idx="1"/>
+          </p:nvPr>
+        </p:nvSpPr>
+        <p:spPr/>
+        <p:txBody>
+          <a:bodyPr/>
+          <a:lstStyle/>
+          <a:p>
+            <a:r>
+              <a:rPr lang="ko-KR" altLang="en-US" smtClean="0"/>
+              <a:t>빌드 관리팀 </a:t>
+            </a:r>
+            <a:r>
+              <a:rPr lang="en-US" altLang="ko-KR" smtClean="0"/>
+              <a:t>: </a:t>
+            </a:r>
+            <a:r>
+              <a:rPr lang="ko-KR" altLang="en-US" smtClean="0"/>
+              <a:t>게임 데이터 버전 관리</a:t>
+            </a:r>
+            <a:endParaRPr lang="en-US" altLang="ko-KR" smtClean="0"/>
+          </a:p>
+          <a:p>
+            <a:r>
+              <a:rPr lang="ko-KR" altLang="en-US" smtClean="0"/>
+              <a:t>게임의 최종 패치 버전을 구성하거나</a:t>
+            </a:r>
+            <a:r>
+              <a:rPr lang="en-US" altLang="ko-KR" smtClean="0"/>
+              <a:t>, </a:t>
+            </a:r>
+            <a:r>
+              <a:rPr lang="ko-KR" altLang="en-US" smtClean="0"/>
+              <a:t>기획자</a:t>
+            </a:r>
+            <a:r>
+              <a:rPr lang="en-US" altLang="ko-KR" smtClean="0"/>
+              <a:t>.</a:t>
+            </a:r>
+            <a:r>
+              <a:rPr lang="ko-KR" altLang="en-US" smtClean="0"/>
+              <a:t>프로그래머</a:t>
+            </a:r>
+            <a:r>
+              <a:rPr lang="en-US" altLang="ko-KR" smtClean="0"/>
+              <a:t>.</a:t>
+            </a:r>
+            <a:r>
+              <a:rPr lang="ko-KR" altLang="en-US" smtClean="0"/>
+              <a:t>그래픽 디자이너들이 만드는 데이터를 최종 관리한다</a:t>
+            </a:r>
+            <a:r>
+              <a:rPr lang="en-US" altLang="ko-KR" smtClean="0"/>
+              <a:t>. </a:t>
+            </a:r>
+          </a:p>
+          <a:p>
+            <a:r>
+              <a:rPr lang="ko-KR" altLang="en-US" smtClean="0"/>
+              <a:t>이들의 데이터를 합쳐서 테스트할 수 있는 테스트가 나오면 </a:t>
+            </a:r>
+            <a:r>
+              <a:rPr lang="en-US" altLang="ko-KR" smtClean="0"/>
+              <a:t>QA</a:t>
+            </a:r>
+            <a:r>
+              <a:rPr lang="ko-KR" altLang="en-US" smtClean="0"/>
+              <a:t>가 테스트를 하고</a:t>
+            </a:r>
+            <a:r>
+              <a:rPr lang="en-US" altLang="ko-KR" smtClean="0"/>
+              <a:t>, </a:t>
+            </a:r>
+            <a:r>
+              <a:rPr lang="ko-KR" altLang="en-US" smtClean="0"/>
+              <a:t>버그나 예외 사항이 발생하면 게임 데이터를 다시 합치고</a:t>
+            </a:r>
+            <a:r>
+              <a:rPr lang="en-US" altLang="ko-KR" smtClean="0"/>
+              <a:t>, </a:t>
+            </a:r>
+            <a:r>
+              <a:rPr lang="ko-KR" altLang="en-US" smtClean="0"/>
+              <a:t>그 문제의 담당에게 문제 보고서를 다시 넘긴다</a:t>
+            </a:r>
+            <a:r>
+              <a:rPr lang="en-US" altLang="ko-KR" smtClean="0"/>
+              <a:t>. </a:t>
+            </a:r>
+            <a:r>
+              <a:rPr lang="ko-KR" altLang="en-US" smtClean="0"/>
+              <a:t>해결하면 다시 이전의 과정이 반복된다</a:t>
+            </a:r>
+            <a:r>
+              <a:rPr lang="en-US" altLang="ko-KR" smtClean="0"/>
+              <a:t>.</a:t>
+            </a:r>
+          </a:p>
+          <a:p>
+            <a:r>
+              <a:rPr lang="ko-KR" altLang="en-US" smtClean="0"/>
+              <a:t>작은 회사들은 프로그래머가 이를 담당하기도 한다</a:t>
+            </a:r>
+            <a:r>
+              <a:rPr lang="en-US" altLang="ko-KR" smtClean="0"/>
+              <a:t>.</a:t>
+            </a:r>
+            <a:endParaRPr lang="ko-KR" altLang="en-US"/>
+          </a:p>
+        </p:txBody>
+      </p:sp>
+    </p:spTree>
+    <p:extLst>
+      <p:ext uri="{BB962C8B-B14F-4D97-AF65-F5344CB8AC3E}">
+        <p14:creationId xmlns:p14="http://schemas.microsoft.com/office/powerpoint/2010/main" val="1597260341"/>
       </p:ext>
     </p:extLst>
   </p:cSld>
